--- a/ppt-generation-enterprise/workspace/某跨界电商品牌-客户洞察驱动的营销增长与流失预警闭环/某跨界电商品牌-客户洞察驱动的营销增长与流失预警闭环方案.pptx
+++ b/ppt-generation-enterprise/workspace/某跨界电商品牌-客户洞察驱动的营销增长与流失预警闭环/某跨界电商品牌-客户洞察驱动的营销增长与流失预警闭环方案.pptx
@@ -14,6 +14,8 @@
     <p:sldId id="262" r:id="rId14"/>
     <p:sldId id="263" r:id="rId15"/>
     <p:sldId id="264" r:id="rId16"/>
+    <p:sldId id="265" r:id="rId17"/>
+    <p:sldId id="266" r:id="rId18"/>
   </p:sldIdLst>
   <p:sldSz cx="12191695" cy="6858000" type="screen4x3"/>
   <p:notesSz cx="6858000" cy="9144000"/>
@@ -515,7 +517,147 @@
           </a:p>
           <a:p>
             <a:r>
-              <a:t>- 该场景适合跨界电商客户，因为它可以用较轻的方式验证 AI 对增长效率和 retention 的直接价值。</a:t>
+              <a:t>- 该场景聚焦营销负责人最关心的三段链路：客群理解、内容执行和客户保留。先通过一个工作台把洞察、生成、复盘和干预串起来，能够快速验证 AI 对增长效率与留存效果的直接价值。</a:t>
+            </a:r>
+          </a:p>
+        </p:txBody>
+      </p:sp>
+      <p:sp>
+        <p:nvSpPr>
+          <p:cNvPr id="4" name="Slide Number Placeholder 3"/>
+          <p:cNvSpPr>
+            <a:spLocks noGrp="1"/>
+          </p:cNvSpPr>
+          <p:nvPr>
+            <p:ph type="sldNum" idx="5" sz="quarter"/>
+          </p:nvPr>
+        </p:nvSpPr>
+        <p:spPr/>
+      </p:sp>
+    </p:spTree>
+  </p:cSld>
+  <p:clrMapOvr>
+    <a:masterClrMapping/>
+  </p:clrMapOvr>
+</p:notes>
+</file>
+
+<file path=ppt/notesSlides/notesSlide10.xml><?xml version="1.0" encoding="utf-8"?>
+<p:notes xmlns:a="http://schemas.openxmlformats.org/drawingml/2006/main" xmlns:p="http://schemas.openxmlformats.org/presentationml/2006/main" xmlns:r="http://schemas.openxmlformats.org/officeDocument/2006/relationships">
+  <p:cSld>
+    <p:spTree>
+      <p:nvGrpSpPr>
+        <p:cNvPr id="1" name=""/>
+        <p:cNvGrpSpPr/>
+        <p:nvPr/>
+      </p:nvGrpSpPr>
+      <p:grpSpPr>
+        <a:xfrm>
+          <a:off x="0" y="0"/>
+          <a:ext cx="0" cy="0"/>
+          <a:chOff x="0" y="0"/>
+          <a:chExt cx="0" cy="0"/>
+        </a:xfrm>
+      </p:grpSpPr>
+      <p:sp>
+        <p:nvSpPr>
+          <p:cNvPr id="2" name="Slide Image Placeholder 1"/>
+          <p:cNvSpPr>
+            <a:spLocks noGrp="1"/>
+          </p:cNvSpPr>
+          <p:nvPr>
+            <p:ph type="sldImg" idx="2"/>
+          </p:nvPr>
+        </p:nvSpPr>
+        <p:spPr/>
+      </p:sp>
+      <p:sp>
+        <p:nvSpPr>
+          <p:cNvPr id="3" name="Notes Placeholder 2"/>
+          <p:cNvSpPr>
+            <a:spLocks noGrp="1"/>
+          </p:cNvSpPr>
+          <p:nvPr>
+            <p:ph type="body" idx="3" sz="quarter"/>
+          </p:nvPr>
+        </p:nvSpPr>
+        <p:spPr/>
+        <p:txBody>
+          <a:bodyPr/>
+          <a:lstStyle/>
+          <a:p>
+            <a:r>
+              <a:t>Title: 业务价值与验证假设</a:t>
+            </a:r>
+          </a:p>
+        </p:txBody>
+      </p:sp>
+      <p:sp>
+        <p:nvSpPr>
+          <p:cNvPr id="4" name="Slide Number Placeholder 3"/>
+          <p:cNvSpPr>
+            <a:spLocks noGrp="1"/>
+          </p:cNvSpPr>
+          <p:nvPr>
+            <p:ph type="sldNum" idx="5" sz="quarter"/>
+          </p:nvPr>
+        </p:nvSpPr>
+        <p:spPr/>
+      </p:sp>
+    </p:spTree>
+  </p:cSld>
+  <p:clrMapOvr>
+    <a:masterClrMapping/>
+  </p:clrMapOvr>
+</p:notes>
+</file>
+
+<file path=ppt/notesSlides/notesSlide11.xml><?xml version="1.0" encoding="utf-8"?>
+<p:notes xmlns:a="http://schemas.openxmlformats.org/drawingml/2006/main" xmlns:p="http://schemas.openxmlformats.org/presentationml/2006/main" xmlns:r="http://schemas.openxmlformats.org/officeDocument/2006/relationships">
+  <p:cSld>
+    <p:spTree>
+      <p:nvGrpSpPr>
+        <p:cNvPr id="1" name=""/>
+        <p:cNvGrpSpPr/>
+        <p:nvPr/>
+      </p:nvGrpSpPr>
+      <p:grpSpPr>
+        <a:xfrm>
+          <a:off x="0" y="0"/>
+          <a:ext cx="0" cy="0"/>
+          <a:chOff x="0" y="0"/>
+          <a:chExt cx="0" cy="0"/>
+        </a:xfrm>
+      </p:grpSpPr>
+      <p:sp>
+        <p:nvSpPr>
+          <p:cNvPr id="2" name="Slide Image Placeholder 1"/>
+          <p:cNvSpPr>
+            <a:spLocks noGrp="1"/>
+          </p:cNvSpPr>
+          <p:nvPr>
+            <p:ph type="sldImg" idx="2"/>
+          </p:nvPr>
+        </p:nvSpPr>
+        <p:spPr/>
+      </p:sp>
+      <p:sp>
+        <p:nvSpPr>
+          <p:cNvPr id="3" name="Notes Placeholder 2"/>
+          <p:cNvSpPr>
+            <a:spLocks noGrp="1"/>
+          </p:cNvSpPr>
+          <p:nvPr>
+            <p:ph type="body" idx="3" sz="quarter"/>
+          </p:nvPr>
+        </p:nvSpPr>
+        <p:spPr/>
+        <p:txBody>
+          <a:bodyPr/>
+          <a:lstStyle/>
+          <a:p>
+            <a:r>
+              <a:t>Title: POC 与下一步</a:t>
             </a:r>
           </a:p>
         </p:txBody>
@@ -800,7 +942,7 @@
           </a:p>
           <a:p>
             <a:r>
-              <a:t>- 该场景适合跨界电商客户，因为它可以用较轻的方式验证 AI 对增长效率和 retention 的直接价值。</a:t>
+              <a:t>- 该场景聚焦营销负责人最关心的三段链路：客群理解、内容执行和客户保留。先通过一个工作台把洞察、生成、复盘和干预串起来，能够快速验证 AI 对增长效率与留存效果的直接价值。</a:t>
             </a:r>
           </a:p>
         </p:txBody>
@@ -940,7 +1082,7 @@
           <a:lstStyle/>
           <a:p>
             <a:r>
-              <a:t>Title: 能力映射与交付物</a:t>
+              <a:t>Title: MVP 原型范围</a:t>
             </a:r>
           </a:p>
         </p:txBody>
@@ -1010,7 +1152,7 @@
           <a:lstStyle/>
           <a:p>
             <a:r>
-              <a:t>Title: 业务价值与验证假设</a:t>
+              <a:t>Title: 原型交付与快速开发路径</a:t>
             </a:r>
           </a:p>
         </p:txBody>
@@ -1080,7 +1222,7 @@
           <a:lstStyle/>
           <a:p>
             <a:r>
-              <a:t>Title: POC 与下一步</a:t>
+              <a:t>Title: 能力映射与交付物</a:t>
             </a:r>
           </a:p>
         </p:txBody>
@@ -4103,7 +4245,7 @@
         <p:spPr>
           <a:xfrm>
             <a:off x="0" y="0"/>
-            <a:ext cx="3840480" cy="6858000"/>
+            <a:ext cx="2468880" cy="6858000"/>
           </a:xfrm>
           <a:prstGeom prst="rect">
             <a:avLst/>
@@ -4139,14 +4281,57 @@
       </p:sp>
       <p:sp>
         <p:nvSpPr>
-          <p:cNvPr id="3" name="TextBox 2"/>
+          <p:cNvPr id="3" name="Rounded Rectangle 2"/>
+          <p:cNvSpPr/>
+          <p:nvPr/>
+        </p:nvSpPr>
+        <p:spPr>
+          <a:xfrm>
+            <a:off x="8732520" y="502920"/>
+            <a:ext cx="1920240" cy="493776"/>
+          </a:xfrm>
+          <a:prstGeom prst="roundRect">
+            <a:avLst/>
+          </a:prstGeom>
+          <a:solidFill>
+            <a:srgbClr val="F3EDED"/>
+          </a:solidFill>
+          <a:ln>
+            <a:noFill/>
+          </a:ln>
+        </p:spPr>
+        <p:style>
+          <a:lnRef idx="1">
+            <a:schemeClr val="accent1"/>
+          </a:lnRef>
+          <a:fillRef idx="3">
+            <a:schemeClr val="accent1"/>
+          </a:fillRef>
+          <a:effectRef idx="2">
+            <a:schemeClr val="accent1"/>
+          </a:effectRef>
+          <a:fontRef idx="minor">
+            <a:schemeClr val="lt1"/>
+          </a:fontRef>
+        </p:style>
+        <p:txBody>
+          <a:bodyPr rtlCol="0" anchor="ctr"/>
+          <a:lstStyle/>
+          <a:p>
+            <a:pPr algn="ctr"/>
+          </a:p>
+        </p:txBody>
+      </p:sp>
+      <p:sp>
+        <p:nvSpPr>
+          <p:cNvPr id="4" name="TextBox 3"/>
           <p:cNvSpPr txBox="1"/>
           <p:nvPr/>
         </p:nvSpPr>
         <p:spPr>
           <a:xfrm>
-            <a:off x="548640" y="594360"/>
-            <a:ext cx="2743200" cy="274320"/>
+            <a:off x="457200" y="640080"/>
+            <a:ext cx="2103120" cy="274320"/>
           </a:xfrm>
           <a:prstGeom prst="rect">
             <a:avLst/>
@@ -4178,14 +4363,14 @@
       </p:sp>
       <p:sp>
         <p:nvSpPr>
-          <p:cNvPr id="4" name="TextBox 3"/>
+          <p:cNvPr id="5" name="TextBox 4"/>
           <p:cNvSpPr txBox="1"/>
           <p:nvPr/>
         </p:nvSpPr>
         <p:spPr>
           <a:xfrm>
-            <a:off x="548640" y="1280160"/>
-            <a:ext cx="2834640" cy="2194560"/>
+            <a:off x="457200" y="6080760"/>
+            <a:ext cx="2011680" cy="320040"/>
           </a:xfrm>
           <a:prstGeom prst="rect">
             <a:avLst/>
@@ -4200,61 +4385,6 @@
           <a:p>
             <a:pPr algn="l">
               <a:spcAft>
-                <a:spcPts val="800"/>
-              </a:spcAft>
-            </a:pPr>
-            <a:r>
-              <a:rPr sz="2400" b="1">
-                <a:solidFill>
-                  <a:srgbClr val="FFFFFF"/>
-                </a:solidFill>
-                <a:latin typeface="Microsoft YaHei"/>
-              </a:rPr>
-              <a:t>客户洞察驱动的营销增长与流失预警闭环</a:t>
-            </a:r>
-          </a:p>
-          <a:p>
-            <a:pPr algn="l">
-              <a:spcAft>
-                <a:spcPts val="800"/>
-              </a:spcAft>
-            </a:pPr>
-            <a:r>
-              <a:rPr sz="2400" b="1">
-                <a:solidFill>
-                  <a:srgbClr val="FFFFFF"/>
-                </a:solidFill>
-                <a:latin typeface="Microsoft YaHei"/>
-              </a:rPr>
-              <a:t>AI Discovery Workshop 商机与原型方案</a:t>
-            </a:r>
-          </a:p>
-        </p:txBody>
-      </p:sp>
-      <p:sp>
-        <p:nvSpPr>
-          <p:cNvPr id="5" name="TextBox 4"/>
-          <p:cNvSpPr txBox="1"/>
-          <p:nvPr/>
-        </p:nvSpPr>
-        <p:spPr>
-          <a:xfrm>
-            <a:off x="548640" y="6035040"/>
-            <a:ext cx="2743200" cy="320040"/>
-          </a:xfrm>
-          <a:prstGeom prst="rect">
-            <a:avLst/>
-          </a:prstGeom>
-          <a:noFill/>
-        </p:spPr>
-        <p:txBody>
-          <a:bodyPr wrap="square" anchor="t">
-            <a:spAutoFit/>
-          </a:bodyPr>
-          <a:lstStyle/>
-          <a:p>
-            <a:pPr algn="l">
-              <a:spcAft>
                 <a:spcPts val="0"/>
               </a:spcAft>
             </a:pPr>
@@ -4278,8 +4408,8 @@
         </p:nvSpPr>
         <p:spPr>
           <a:xfrm>
-            <a:off x="4297680" y="960120"/>
-            <a:ext cx="7132320" cy="5074920"/>
+            <a:off x="2743200" y="804672"/>
+            <a:ext cx="7863840" cy="4754880"/>
           </a:xfrm>
           <a:prstGeom prst="roundRect">
             <a:avLst>
@@ -4325,8 +4455,47 @@
         </p:nvSpPr>
         <p:spPr>
           <a:xfrm>
-            <a:off x="4663440" y="1234440"/>
-            <a:ext cx="6355080" cy="914400"/>
+            <a:off x="3090672" y="1024128"/>
+            <a:ext cx="6858000" cy="256032"/>
+          </a:xfrm>
+          <a:prstGeom prst="rect">
+            <a:avLst/>
+          </a:prstGeom>
+          <a:noFill/>
+        </p:spPr>
+        <p:txBody>
+          <a:bodyPr wrap="square" anchor="ctr">
+            <a:spAutoFit/>
+          </a:bodyPr>
+          <a:lstStyle/>
+          <a:p>
+            <a:pPr algn="l">
+              <a:spcAft>
+                <a:spcPts val="0"/>
+              </a:spcAft>
+            </a:pPr>
+            <a:r>
+              <a:rPr sz="1050" b="0">
+                <a:solidFill>
+                  <a:srgbClr val="999999"/>
+                </a:solidFill>
+                <a:latin typeface="Microsoft YaHei"/>
+              </a:rPr>
+              <a:t>客户：某跨界电商品牌 | 行业：跨界电商 · 第 2 组 · 日期 2026-05-08</a:t>
+            </a:r>
+          </a:p>
+        </p:txBody>
+      </p:sp>
+      <p:sp>
+        <p:nvSpPr>
+          <p:cNvPr id="8" name="TextBox 7"/>
+          <p:cNvSpPr txBox="1"/>
+          <p:nvPr/>
+        </p:nvSpPr>
+        <p:spPr>
+          <a:xfrm>
+            <a:off x="3090672" y="1389888"/>
+            <a:ext cx="6812280" cy="1207008"/>
           </a:xfrm>
           <a:prstGeom prst="rect">
             <a:avLst/>
@@ -4345,7 +4514,7 @@
               </a:spcAft>
             </a:pPr>
             <a:r>
-              <a:rPr sz="2400" b="1">
+              <a:rPr sz="3000" b="1">
                 <a:solidFill>
                   <a:srgbClr val="C62828"/>
                 </a:solidFill>
@@ -4358,14 +4527,14 @@
       </p:sp>
       <p:sp>
         <p:nvSpPr>
-          <p:cNvPr id="8" name="TextBox 7"/>
+          <p:cNvPr id="9" name="TextBox 8"/>
           <p:cNvSpPr txBox="1"/>
           <p:nvPr/>
         </p:nvSpPr>
         <p:spPr>
           <a:xfrm>
-            <a:off x="4709160" y="2148840"/>
-            <a:ext cx="6355080" cy="384048"/>
+            <a:off x="3108960" y="2523744"/>
+            <a:ext cx="5852160" cy="310896"/>
           </a:xfrm>
           <a:prstGeom prst="rect">
             <a:avLst/>
@@ -4384,7 +4553,7 @@
               </a:spcAft>
             </a:pPr>
             <a:r>
-              <a:rPr sz="1300" b="0">
+              <a:rPr sz="1150" b="0">
                 <a:solidFill>
                   <a:srgbClr val="999999"/>
                 </a:solidFill>
@@ -4397,14 +4566,544 @@
       </p:sp>
       <p:sp>
         <p:nvSpPr>
-          <p:cNvPr id="9" name="TextBox 8"/>
+          <p:cNvPr id="10" name="Rounded Rectangle 9"/>
+          <p:cNvSpPr/>
+          <p:nvPr/>
+        </p:nvSpPr>
+        <p:spPr>
+          <a:xfrm>
+            <a:off x="3090672" y="2926080"/>
+            <a:ext cx="6894576" cy="896112"/>
+          </a:xfrm>
+          <a:prstGeom prst="roundRect">
+            <a:avLst>
+              <a:gd name="adj" fmla="val 10000"/>
+            </a:avLst>
+          </a:prstGeom>
+          <a:solidFill>
+            <a:srgbClr val="F3EDED"/>
+          </a:solidFill>
+          <a:ln w="10160">
+            <a:solidFill>
+              <a:srgbClr val="E9DDDD"/>
+            </a:solidFill>
+          </a:ln>
+        </p:spPr>
+        <p:style>
+          <a:lnRef idx="1">
+            <a:schemeClr val="accent1"/>
+          </a:lnRef>
+          <a:fillRef idx="3">
+            <a:schemeClr val="accent1"/>
+          </a:fillRef>
+          <a:effectRef idx="2">
+            <a:schemeClr val="accent1"/>
+          </a:effectRef>
+          <a:fontRef idx="minor">
+            <a:schemeClr val="lt1"/>
+          </a:fontRef>
+        </p:style>
+        <p:txBody>
+          <a:bodyPr rtlCol="0" anchor="ctr"/>
+          <a:lstStyle/>
+          <a:p>
+            <a:pPr algn="ctr"/>
+          </a:p>
+        </p:txBody>
+      </p:sp>
+      <p:sp>
+        <p:nvSpPr>
+          <p:cNvPr id="11" name="TextBox 10"/>
           <p:cNvSpPr txBox="1"/>
           <p:nvPr/>
         </p:nvSpPr>
         <p:spPr>
           <a:xfrm>
-            <a:off x="4663440" y="2743200"/>
-            <a:ext cx="6309360" cy="1051560"/>
+            <a:off x="3310128" y="3163824"/>
+            <a:ext cx="6446520" cy="329184"/>
+          </a:xfrm>
+          <a:prstGeom prst="rect">
+            <a:avLst/>
+          </a:prstGeom>
+          <a:noFill/>
+        </p:spPr>
+        <p:txBody>
+          <a:bodyPr wrap="square" anchor="ctr">
+            <a:spAutoFit/>
+          </a:bodyPr>
+          <a:lstStyle/>
+          <a:p>
+            <a:pPr algn="l">
+              <a:spcAft>
+                <a:spcPts val="0"/>
+              </a:spcAft>
+            </a:pPr>
+            <a:r>
+              <a:rPr sz="1400" b="0">
+                <a:solidFill>
+                  <a:srgbClr val="555555"/>
+                </a:solidFill>
+                <a:latin typeface="Microsoft YaHei"/>
+              </a:rPr>
+              <a:t>让营销团队从多系统切换和人工拼装，转向在一个工作台里完成洞察、生成、复盘和干预。</a:t>
+            </a:r>
+          </a:p>
+        </p:txBody>
+      </p:sp>
+      <p:sp>
+        <p:nvSpPr>
+          <p:cNvPr id="12" name="Rounded Rectangle 11"/>
+          <p:cNvSpPr/>
+          <p:nvPr/>
+        </p:nvSpPr>
+        <p:spPr>
+          <a:xfrm>
+            <a:off x="3090672" y="4133087"/>
+            <a:ext cx="3456432" cy="658368"/>
+          </a:xfrm>
+          <a:prstGeom prst="roundRect">
+            <a:avLst>
+              <a:gd name="adj" fmla="val 10000"/>
+            </a:avLst>
+          </a:prstGeom>
+          <a:solidFill>
+            <a:srgbClr val="F3EDED"/>
+          </a:solidFill>
+          <a:ln w="10160">
+            <a:solidFill>
+              <a:srgbClr val="E9DDDD"/>
+            </a:solidFill>
+          </a:ln>
+        </p:spPr>
+        <p:style>
+          <a:lnRef idx="1">
+            <a:schemeClr val="accent1"/>
+          </a:lnRef>
+          <a:fillRef idx="3">
+            <a:schemeClr val="accent1"/>
+          </a:fillRef>
+          <a:effectRef idx="2">
+            <a:schemeClr val="accent1"/>
+          </a:effectRef>
+          <a:fontRef idx="minor">
+            <a:schemeClr val="lt1"/>
+          </a:fontRef>
+        </p:style>
+        <p:txBody>
+          <a:bodyPr rtlCol="0" anchor="ctr"/>
+          <a:lstStyle/>
+          <a:p>
+            <a:pPr algn="ctr"/>
+          </a:p>
+        </p:txBody>
+      </p:sp>
+      <p:sp>
+        <p:nvSpPr>
+          <p:cNvPr id="13" name="TextBox 12"/>
+          <p:cNvSpPr txBox="1"/>
+          <p:nvPr/>
+        </p:nvSpPr>
+        <p:spPr>
+          <a:xfrm>
+            <a:off x="3255264" y="4215383"/>
+            <a:ext cx="3127248" cy="128016"/>
+          </a:xfrm>
+          <a:prstGeom prst="rect">
+            <a:avLst/>
+          </a:prstGeom>
+          <a:noFill/>
+        </p:spPr>
+        <p:txBody>
+          <a:bodyPr wrap="square" anchor="ctr">
+            <a:spAutoFit/>
+          </a:bodyPr>
+          <a:lstStyle/>
+          <a:p>
+            <a:pPr algn="l">
+              <a:spcAft>
+                <a:spcPts val="0"/>
+              </a:spcAft>
+            </a:pPr>
+            <a:r>
+              <a:rPr sz="850" b="0">
+                <a:solidFill>
+                  <a:srgbClr val="999999"/>
+                </a:solidFill>
+                <a:latin typeface="Arial"/>
+              </a:rPr>
+              <a:t>客户与行业</a:t>
+            </a:r>
+          </a:p>
+        </p:txBody>
+      </p:sp>
+      <p:sp>
+        <p:nvSpPr>
+          <p:cNvPr id="14" name="TextBox 13"/>
+          <p:cNvSpPr txBox="1"/>
+          <p:nvPr/>
+        </p:nvSpPr>
+        <p:spPr>
+          <a:xfrm>
+            <a:off x="3255264" y="4379975"/>
+            <a:ext cx="3127248" cy="201168"/>
+          </a:xfrm>
+          <a:prstGeom prst="rect">
+            <a:avLst/>
+          </a:prstGeom>
+          <a:noFill/>
+        </p:spPr>
+        <p:txBody>
+          <a:bodyPr wrap="square" anchor="ctr">
+            <a:spAutoFit/>
+          </a:bodyPr>
+          <a:lstStyle/>
+          <a:p>
+            <a:pPr algn="l">
+              <a:spcAft>
+                <a:spcPts val="0"/>
+              </a:spcAft>
+            </a:pPr>
+            <a:r>
+              <a:rPr sz="1050" b="0">
+                <a:solidFill>
+                  <a:srgbClr val="555555"/>
+                </a:solidFill>
+                <a:latin typeface="Microsoft YaHei"/>
+              </a:rPr>
+              <a:t>客户：某跨界电商品牌 | 行业：跨界电商</a:t>
+            </a:r>
+          </a:p>
+        </p:txBody>
+      </p:sp>
+      <p:sp>
+        <p:nvSpPr>
+          <p:cNvPr id="15" name="Rounded Rectangle 14"/>
+          <p:cNvSpPr/>
+          <p:nvPr/>
+        </p:nvSpPr>
+        <p:spPr>
+          <a:xfrm>
+            <a:off x="6711696" y="4133087"/>
+            <a:ext cx="2084831" cy="658368"/>
+          </a:xfrm>
+          <a:prstGeom prst="roundRect">
+            <a:avLst>
+              <a:gd name="adj" fmla="val 10000"/>
+            </a:avLst>
+          </a:prstGeom>
+          <a:solidFill>
+            <a:srgbClr val="F3EDED"/>
+          </a:solidFill>
+          <a:ln w="10160">
+            <a:solidFill>
+              <a:srgbClr val="E9DDDD"/>
+            </a:solidFill>
+          </a:ln>
+        </p:spPr>
+        <p:style>
+          <a:lnRef idx="1">
+            <a:schemeClr val="accent1"/>
+          </a:lnRef>
+          <a:fillRef idx="3">
+            <a:schemeClr val="accent1"/>
+          </a:fillRef>
+          <a:effectRef idx="2">
+            <a:schemeClr val="accent1"/>
+          </a:effectRef>
+          <a:fontRef idx="minor">
+            <a:schemeClr val="lt1"/>
+          </a:fontRef>
+        </p:style>
+        <p:txBody>
+          <a:bodyPr rtlCol="0" anchor="ctr"/>
+          <a:lstStyle/>
+          <a:p>
+            <a:pPr algn="ctr"/>
+          </a:p>
+        </p:txBody>
+      </p:sp>
+      <p:sp>
+        <p:nvSpPr>
+          <p:cNvPr id="16" name="TextBox 15"/>
+          <p:cNvSpPr txBox="1"/>
+          <p:nvPr/>
+        </p:nvSpPr>
+        <p:spPr>
+          <a:xfrm>
+            <a:off x="6876288" y="4215383"/>
+            <a:ext cx="1755648" cy="128016"/>
+          </a:xfrm>
+          <a:prstGeom prst="rect">
+            <a:avLst/>
+          </a:prstGeom>
+          <a:noFill/>
+        </p:spPr>
+        <p:txBody>
+          <a:bodyPr wrap="square" anchor="ctr">
+            <a:spAutoFit/>
+          </a:bodyPr>
+          <a:lstStyle/>
+          <a:p>
+            <a:pPr algn="l">
+              <a:spcAft>
+                <a:spcPts val="0"/>
+              </a:spcAft>
+            </a:pPr>
+            <a:r>
+              <a:rPr sz="850" b="0">
+                <a:solidFill>
+                  <a:srgbClr val="999999"/>
+                </a:solidFill>
+                <a:latin typeface="Arial"/>
+              </a:rPr>
+              <a:t>小组与日期</a:t>
+            </a:r>
+          </a:p>
+        </p:txBody>
+      </p:sp>
+      <p:sp>
+        <p:nvSpPr>
+          <p:cNvPr id="17" name="TextBox 16"/>
+          <p:cNvSpPr txBox="1"/>
+          <p:nvPr/>
+        </p:nvSpPr>
+        <p:spPr>
+          <a:xfrm>
+            <a:off x="6876288" y="4379975"/>
+            <a:ext cx="1755648" cy="201168"/>
+          </a:xfrm>
+          <a:prstGeom prst="rect">
+            <a:avLst/>
+          </a:prstGeom>
+          <a:noFill/>
+        </p:spPr>
+        <p:txBody>
+          <a:bodyPr wrap="square" anchor="ctr">
+            <a:spAutoFit/>
+          </a:bodyPr>
+          <a:lstStyle/>
+          <a:p>
+            <a:pPr algn="l">
+              <a:spcAft>
+                <a:spcPts val="0"/>
+              </a:spcAft>
+            </a:pPr>
+            <a:r>
+              <a:rPr sz="1050" b="0">
+                <a:solidFill>
+                  <a:srgbClr val="555555"/>
+                </a:solidFill>
+                <a:latin typeface="Microsoft YaHei"/>
+              </a:rPr>
+              <a:t>小组：第 2 组 · 日期：2026-05-08</a:t>
+            </a:r>
+          </a:p>
+        </p:txBody>
+      </p:sp>
+      <p:sp>
+        <p:nvSpPr>
+          <p:cNvPr id="18" name="Rounded Rectangle 17"/>
+          <p:cNvSpPr/>
+          <p:nvPr/>
+        </p:nvSpPr>
+        <p:spPr>
+          <a:xfrm>
+            <a:off x="8961120" y="4133087"/>
+            <a:ext cx="1024128" cy="658368"/>
+          </a:xfrm>
+          <a:prstGeom prst="roundRect">
+            <a:avLst>
+              <a:gd name="adj" fmla="val 10000"/>
+            </a:avLst>
+          </a:prstGeom>
+          <a:solidFill>
+            <a:srgbClr val="F3EDED"/>
+          </a:solidFill>
+          <a:ln w="10160">
+            <a:solidFill>
+              <a:srgbClr val="E9DDDD"/>
+            </a:solidFill>
+          </a:ln>
+        </p:spPr>
+        <p:style>
+          <a:lnRef idx="1">
+            <a:schemeClr val="accent1"/>
+          </a:lnRef>
+          <a:fillRef idx="3">
+            <a:schemeClr val="accent1"/>
+          </a:fillRef>
+          <a:effectRef idx="2">
+            <a:schemeClr val="accent1"/>
+          </a:effectRef>
+          <a:fontRef idx="minor">
+            <a:schemeClr val="lt1"/>
+          </a:fontRef>
+        </p:style>
+        <p:txBody>
+          <a:bodyPr rtlCol="0" anchor="ctr"/>
+          <a:lstStyle/>
+          <a:p>
+            <a:pPr algn="ctr"/>
+          </a:p>
+        </p:txBody>
+      </p:sp>
+      <p:sp>
+        <p:nvSpPr>
+          <p:cNvPr id="19" name="TextBox 18"/>
+          <p:cNvSpPr txBox="1"/>
+          <p:nvPr/>
+        </p:nvSpPr>
+        <p:spPr>
+          <a:xfrm>
+            <a:off x="9125712" y="4215383"/>
+            <a:ext cx="694944" cy="128016"/>
+          </a:xfrm>
+          <a:prstGeom prst="rect">
+            <a:avLst/>
+          </a:prstGeom>
+          <a:noFill/>
+        </p:spPr>
+        <p:txBody>
+          <a:bodyPr wrap="square" anchor="ctr">
+            <a:spAutoFit/>
+          </a:bodyPr>
+          <a:lstStyle/>
+          <a:p>
+            <a:pPr algn="l">
+              <a:spcAft>
+                <a:spcPts val="0"/>
+              </a:spcAft>
+            </a:pPr>
+            <a:r>
+              <a:rPr sz="850" b="0">
+                <a:solidFill>
+                  <a:srgbClr val="999999"/>
+                </a:solidFill>
+                <a:latin typeface="Arial"/>
+              </a:rPr>
+              <a:t>Workshop</a:t>
+            </a:r>
+          </a:p>
+        </p:txBody>
+      </p:sp>
+      <p:sp>
+        <p:nvSpPr>
+          <p:cNvPr id="20" name="TextBox 19"/>
+          <p:cNvSpPr txBox="1"/>
+          <p:nvPr/>
+        </p:nvSpPr>
+        <p:spPr>
+          <a:xfrm>
+            <a:off x="9125712" y="4379975"/>
+            <a:ext cx="694944" cy="201168"/>
+          </a:xfrm>
+          <a:prstGeom prst="rect">
+            <a:avLst/>
+          </a:prstGeom>
+          <a:noFill/>
+        </p:spPr>
+        <p:txBody>
+          <a:bodyPr wrap="square" anchor="ctr">
+            <a:spAutoFit/>
+          </a:bodyPr>
+          <a:lstStyle/>
+          <a:p>
+            <a:pPr algn="l">
+              <a:spcAft>
+                <a:spcPts val="0"/>
+              </a:spcAft>
+            </a:pPr>
+            <a:r>
+              <a:rPr sz="1050" b="0">
+                <a:solidFill>
+                  <a:srgbClr val="555555"/>
+                </a:solidFill>
+                <a:latin typeface="Microsoft YaHei"/>
+              </a:rPr>
+              <a:t>Workshop：AI Discovery Card Workshop</a:t>
+            </a:r>
+          </a:p>
+        </p:txBody>
+      </p:sp>
+    </p:spTree>
+  </p:cSld>
+  <p:clrMapOvr>
+    <a:masterClrMapping/>
+  </p:clrMapOvr>
+</p:sld>
+</file>
+
+<file path=ppt/slides/slide10.xml><?xml version="1.0" encoding="utf-8"?>
+<p:sld xmlns:a="http://schemas.openxmlformats.org/drawingml/2006/main" xmlns:p="http://schemas.openxmlformats.org/presentationml/2006/main" xmlns:r="http://schemas.openxmlformats.org/officeDocument/2006/relationships">
+  <p:cSld>
+    <p:bg>
+      <p:bgPr>
+        <a:solidFill>
+          <a:srgbClr val="FFFFFF"/>
+        </a:solidFill>
+        <a:effectLst/>
+      </p:bgPr>
+    </p:bg>
+    <p:spTree>
+      <p:nvGrpSpPr>
+        <p:cNvPr id="1" name=""/>
+        <p:cNvGrpSpPr/>
+        <p:nvPr/>
+      </p:nvGrpSpPr>
+      <p:grpSpPr/>
+      <p:sp>
+        <p:nvSpPr>
+          <p:cNvPr id="2" name="Rectangle 1"/>
+          <p:cNvSpPr/>
+          <p:nvPr/>
+        </p:nvSpPr>
+        <p:spPr>
+          <a:xfrm>
+            <a:off x="548640" y="502920"/>
+            <a:ext cx="109728" cy="822960"/>
+          </a:xfrm>
+          <a:prstGeom prst="rect">
+            <a:avLst/>
+          </a:prstGeom>
+          <a:solidFill>
+            <a:srgbClr val="E91E63"/>
+          </a:solidFill>
+          <a:ln>
+            <a:noFill/>
+          </a:ln>
+        </p:spPr>
+        <p:style>
+          <a:lnRef idx="1">
+            <a:schemeClr val="accent1"/>
+          </a:lnRef>
+          <a:fillRef idx="3">
+            <a:schemeClr val="accent1"/>
+          </a:fillRef>
+          <a:effectRef idx="2">
+            <a:schemeClr val="accent1"/>
+          </a:effectRef>
+          <a:fontRef idx="minor">
+            <a:schemeClr val="lt1"/>
+          </a:fontRef>
+        </p:style>
+        <p:txBody>
+          <a:bodyPr rtlCol="0" anchor="ctr"/>
+          <a:lstStyle/>
+          <a:p>
+            <a:pPr algn="ctr"/>
+          </a:p>
+        </p:txBody>
+      </p:sp>
+      <p:sp>
+        <p:nvSpPr>
+          <p:cNvPr id="3" name="TextBox 2"/>
+          <p:cNvSpPr txBox="1"/>
+          <p:nvPr/>
+        </p:nvSpPr>
+        <p:spPr>
+          <a:xfrm>
+            <a:off x="822960" y="457200"/>
+            <a:ext cx="8046720" cy="640080"/>
           </a:xfrm>
           <a:prstGeom prst="rect">
             <a:avLst/>
@@ -4419,47 +5118,121 @@
           <a:p>
             <a:pPr algn="l">
               <a:spcAft>
-                <a:spcPts val="500"/>
-              </a:spcAft>
-            </a:pPr>
-            <a:r>
-              <a:rPr sz="1400" b="0">
-                <a:solidFill>
-                  <a:srgbClr val="555555"/>
-                </a:solidFill>
-                <a:latin typeface="Microsoft YaHei"/>
-              </a:rPr>
-              <a:t>客户：某跨界电商品牌 | 行业：跨界电商</a:t>
-            </a:r>
-          </a:p>
-          <a:p>
-            <a:pPr algn="l">
-              <a:spcAft>
-                <a:spcPts val="500"/>
-              </a:spcAft>
-            </a:pPr>
-            <a:r>
-              <a:rPr sz="1400" b="0">
-                <a:solidFill>
-                  <a:srgbClr val="555555"/>
-                </a:solidFill>
-                <a:latin typeface="Microsoft YaHei"/>
-              </a:rPr>
-              <a:t>第 2 组 · 日期 2026-05-22</a:t>
-            </a:r>
-          </a:p>
-        </p:txBody>
-      </p:sp>
-      <p:sp>
-        <p:nvSpPr>
-          <p:cNvPr id="10" name="TextBox 9"/>
+                <a:spcPts val="0"/>
+              </a:spcAft>
+            </a:pPr>
+            <a:r>
+              <a:rPr sz="2400" b="1">
+                <a:solidFill>
+                  <a:srgbClr val="C62828"/>
+                </a:solidFill>
+                <a:latin typeface="Microsoft YaHei"/>
+              </a:rPr>
+              <a:t>业务价值与验证假设</a:t>
+            </a:r>
+          </a:p>
+        </p:txBody>
+      </p:sp>
+      <p:sp>
+        <p:nvSpPr>
+          <p:cNvPr id="4" name="Rectangle 3"/>
+          <p:cNvSpPr/>
+          <p:nvPr/>
+        </p:nvSpPr>
+        <p:spPr>
+          <a:xfrm>
+            <a:off x="822960" y="1325880"/>
+            <a:ext cx="10515600" cy="27432"/>
+          </a:xfrm>
+          <a:prstGeom prst="rect">
+            <a:avLst/>
+          </a:prstGeom>
+          <a:solidFill>
+            <a:srgbClr val="F3EDED"/>
+          </a:solidFill>
+          <a:ln>
+            <a:noFill/>
+          </a:ln>
+        </p:spPr>
+        <p:style>
+          <a:lnRef idx="1">
+            <a:schemeClr val="accent1"/>
+          </a:lnRef>
+          <a:fillRef idx="3">
+            <a:schemeClr val="accent1"/>
+          </a:fillRef>
+          <a:effectRef idx="2">
+            <a:schemeClr val="accent1"/>
+          </a:effectRef>
+          <a:fontRef idx="minor">
+            <a:schemeClr val="lt1"/>
+          </a:fontRef>
+        </p:style>
+        <p:txBody>
+          <a:bodyPr rtlCol="0" anchor="ctr"/>
+          <a:lstStyle/>
+          <a:p>
+            <a:pPr algn="ctr"/>
+          </a:p>
+        </p:txBody>
+      </p:sp>
+      <p:sp>
+        <p:nvSpPr>
+          <p:cNvPr id="5" name="Rounded Rectangle 4"/>
+          <p:cNvSpPr/>
+          <p:nvPr/>
+        </p:nvSpPr>
+        <p:spPr>
+          <a:xfrm>
+            <a:off x="822960" y="1783080"/>
+            <a:ext cx="3246120" cy="4480560"/>
+          </a:xfrm>
+          <a:prstGeom prst="roundRect">
+            <a:avLst>
+              <a:gd name="adj" fmla="val 10000"/>
+            </a:avLst>
+          </a:prstGeom>
+          <a:solidFill>
+            <a:srgbClr val="F8F4F4"/>
+          </a:solidFill>
+          <a:ln w="10160">
+            <a:solidFill>
+              <a:srgbClr val="E9DDDD"/>
+            </a:solidFill>
+          </a:ln>
+        </p:spPr>
+        <p:style>
+          <a:lnRef idx="1">
+            <a:schemeClr val="accent1"/>
+          </a:lnRef>
+          <a:fillRef idx="3">
+            <a:schemeClr val="accent1"/>
+          </a:fillRef>
+          <a:effectRef idx="2">
+            <a:schemeClr val="accent1"/>
+          </a:effectRef>
+          <a:fontRef idx="minor">
+            <a:schemeClr val="lt1"/>
+          </a:fontRef>
+        </p:style>
+        <p:txBody>
+          <a:bodyPr rtlCol="0" anchor="ctr"/>
+          <a:lstStyle/>
+          <a:p>
+            <a:pPr algn="ctr"/>
+          </a:p>
+        </p:txBody>
+      </p:sp>
+      <p:sp>
+        <p:nvSpPr>
+          <p:cNvPr id="6" name="TextBox 5"/>
           <p:cNvSpPr txBox="1"/>
           <p:nvPr/>
         </p:nvSpPr>
         <p:spPr>
           <a:xfrm>
-            <a:off x="4663440" y="4709160"/>
-            <a:ext cx="6126480" cy="502920"/>
+            <a:off x="1024128" y="1993392"/>
+            <a:ext cx="2834640" cy="274320"/>
           </a:xfrm>
           <a:prstGeom prst="rect">
             <a:avLst/>
@@ -4478,13 +5251,1034 @@
               </a:spcAft>
             </a:pPr>
             <a:r>
-              <a:rPr sz="1050" b="0">
-                <a:solidFill>
-                  <a:srgbClr val="999999"/>
-                </a:solidFill>
-                <a:latin typeface="Microsoft YaHei"/>
-              </a:rPr>
-              <a:t>该场景适合跨界电商客户，因为它可以用较轻的方式验证 AI 对增长效率和 retention 的直接价值。</a:t>
+              <a:rPr sz="1650" b="1">
+                <a:solidFill>
+                  <a:srgbClr val="C62828"/>
+                </a:solidFill>
+                <a:latin typeface="Microsoft YaHei"/>
+              </a:rPr>
+              <a:t>业务价值</a:t>
+            </a:r>
+          </a:p>
+        </p:txBody>
+      </p:sp>
+      <p:sp>
+        <p:nvSpPr>
+          <p:cNvPr id="7" name="TextBox 6"/>
+          <p:cNvSpPr txBox="1"/>
+          <p:nvPr/>
+        </p:nvSpPr>
+        <p:spPr>
+          <a:xfrm>
+            <a:off x="1024128" y="2468880"/>
+            <a:ext cx="2834640" cy="3246120"/>
+          </a:xfrm>
+          <a:prstGeom prst="rect">
+            <a:avLst/>
+          </a:prstGeom>
+          <a:noFill/>
+        </p:spPr>
+        <p:txBody>
+          <a:bodyPr wrap="square" anchor="t">
+            <a:spAutoFit/>
+          </a:bodyPr>
+          <a:lstStyle/>
+          <a:p>
+            <a:pPr algn="l">
+              <a:spcAft>
+                <a:spcPts val="800"/>
+              </a:spcAft>
+            </a:pPr>
+            <a:r>
+              <a:rPr sz="1400" b="0">
+                <a:solidFill>
+                  <a:srgbClr val="555555"/>
+                </a:solidFill>
+                <a:latin typeface="Microsoft YaHei"/>
+              </a:rPr>
+              <a:t>缩短从客户洞察到活动上线的准备周期</a:t>
+            </a:r>
+          </a:p>
+          <a:p>
+            <a:pPr algn="l">
+              <a:spcAft>
+                <a:spcPts val="800"/>
+              </a:spcAft>
+            </a:pPr>
+            <a:r>
+              <a:rPr sz="1400" b="0">
+                <a:solidFill>
+                  <a:srgbClr val="555555"/>
+                </a:solidFill>
+                <a:latin typeface="Microsoft YaHei"/>
+              </a:rPr>
+              <a:t>提升个性化营销内容和页面生产效率</a:t>
+            </a:r>
+          </a:p>
+          <a:p>
+            <a:pPr algn="l">
+              <a:spcAft>
+                <a:spcPts val="800"/>
+              </a:spcAft>
+            </a:pPr>
+            <a:r>
+              <a:rPr sz="1400" b="0">
+                <a:solidFill>
+                  <a:srgbClr val="555555"/>
+                </a:solidFill>
+                <a:latin typeface="Microsoft YaHei"/>
+              </a:rPr>
+              <a:t>让活动分析结果更快回流到下一轮增长动作</a:t>
+            </a:r>
+          </a:p>
+          <a:p>
+            <a:pPr algn="l">
+              <a:spcAft>
+                <a:spcPts val="800"/>
+              </a:spcAft>
+            </a:pPr>
+            <a:r>
+              <a:rPr sz="1400" b="0">
+                <a:solidFill>
+                  <a:srgbClr val="555555"/>
+                </a:solidFill>
+                <a:latin typeface="Microsoft YaHei"/>
+              </a:rPr>
+              <a:t>更早识别高流失风险客户并启动保留干预</a:t>
+            </a:r>
+          </a:p>
+        </p:txBody>
+      </p:sp>
+      <p:sp>
+        <p:nvSpPr>
+          <p:cNvPr id="8" name="Rounded Rectangle 7"/>
+          <p:cNvSpPr/>
+          <p:nvPr/>
+        </p:nvSpPr>
+        <p:spPr>
+          <a:xfrm>
+            <a:off x="4462272" y="1783080"/>
+            <a:ext cx="3246120" cy="4480560"/>
+          </a:xfrm>
+          <a:prstGeom prst="roundRect">
+            <a:avLst>
+              <a:gd name="adj" fmla="val 10000"/>
+            </a:avLst>
+          </a:prstGeom>
+          <a:solidFill>
+            <a:srgbClr val="F3EDED"/>
+          </a:solidFill>
+          <a:ln w="10160">
+            <a:solidFill>
+              <a:srgbClr val="E9DDDD"/>
+            </a:solidFill>
+          </a:ln>
+        </p:spPr>
+        <p:style>
+          <a:lnRef idx="1">
+            <a:schemeClr val="accent1"/>
+          </a:lnRef>
+          <a:fillRef idx="3">
+            <a:schemeClr val="accent1"/>
+          </a:fillRef>
+          <a:effectRef idx="2">
+            <a:schemeClr val="accent1"/>
+          </a:effectRef>
+          <a:fontRef idx="minor">
+            <a:schemeClr val="lt1"/>
+          </a:fontRef>
+        </p:style>
+        <p:txBody>
+          <a:bodyPr rtlCol="0" anchor="ctr"/>
+          <a:lstStyle/>
+          <a:p>
+            <a:pPr algn="ctr"/>
+          </a:p>
+        </p:txBody>
+      </p:sp>
+      <p:sp>
+        <p:nvSpPr>
+          <p:cNvPr id="9" name="TextBox 8"/>
+          <p:cNvSpPr txBox="1"/>
+          <p:nvPr/>
+        </p:nvSpPr>
+        <p:spPr>
+          <a:xfrm>
+            <a:off x="4663440" y="1993392"/>
+            <a:ext cx="2834640" cy="274320"/>
+          </a:xfrm>
+          <a:prstGeom prst="rect">
+            <a:avLst/>
+          </a:prstGeom>
+          <a:noFill/>
+        </p:spPr>
+        <p:txBody>
+          <a:bodyPr wrap="square" anchor="t">
+            <a:spAutoFit/>
+          </a:bodyPr>
+          <a:lstStyle/>
+          <a:p>
+            <a:pPr algn="l">
+              <a:spcAft>
+                <a:spcPts val="0"/>
+              </a:spcAft>
+            </a:pPr>
+            <a:r>
+              <a:rPr sz="1650" b="1">
+                <a:solidFill>
+                  <a:srgbClr val="C62828"/>
+                </a:solidFill>
+                <a:latin typeface="Microsoft YaHei"/>
+              </a:rPr>
+              <a:t>关键指标</a:t>
+            </a:r>
+          </a:p>
+        </p:txBody>
+      </p:sp>
+      <p:sp>
+        <p:nvSpPr>
+          <p:cNvPr id="10" name="TextBox 9"/>
+          <p:cNvSpPr txBox="1"/>
+          <p:nvPr/>
+        </p:nvSpPr>
+        <p:spPr>
+          <a:xfrm>
+            <a:off x="4663440" y="2468880"/>
+            <a:ext cx="2834640" cy="3246120"/>
+          </a:xfrm>
+          <a:prstGeom prst="rect">
+            <a:avLst/>
+          </a:prstGeom>
+          <a:noFill/>
+        </p:spPr>
+        <p:txBody>
+          <a:bodyPr wrap="square" anchor="t">
+            <a:spAutoFit/>
+          </a:bodyPr>
+          <a:lstStyle/>
+          <a:p>
+            <a:pPr algn="l">
+              <a:spcAft>
+                <a:spcPts val="800"/>
+              </a:spcAft>
+            </a:pPr>
+            <a:r>
+              <a:rPr sz="1400" b="0">
+                <a:solidFill>
+                  <a:srgbClr val="555555"/>
+                </a:solidFill>
+                <a:latin typeface="Microsoft YaHei"/>
+              </a:rPr>
+              <a:t>营销活动准备周期缩短 40%</a:t>
+            </a:r>
+          </a:p>
+          <a:p>
+            <a:pPr algn="l">
+              <a:spcAft>
+                <a:spcPts val="800"/>
+              </a:spcAft>
+            </a:pPr>
+            <a:r>
+              <a:rPr sz="1400" b="0">
+                <a:solidFill>
+                  <a:srgbClr val="555555"/>
+                </a:solidFill>
+                <a:latin typeface="Microsoft YaHei"/>
+              </a:rPr>
+              <a:t>内容与页面生产效率提升 50%</a:t>
+            </a:r>
+          </a:p>
+          <a:p>
+            <a:pPr algn="l">
+              <a:spcAft>
+                <a:spcPts val="800"/>
+              </a:spcAft>
+            </a:pPr>
+            <a:r>
+              <a:rPr sz="1400" b="0">
+                <a:solidFill>
+                  <a:srgbClr val="555555"/>
+                </a:solidFill>
+                <a:latin typeface="Microsoft YaHei"/>
+              </a:rPr>
+              <a:t>活动复盘出具时间缩短 60%</a:t>
+            </a:r>
+          </a:p>
+          <a:p>
+            <a:pPr algn="l">
+              <a:spcAft>
+                <a:spcPts val="800"/>
+              </a:spcAft>
+            </a:pPr>
+            <a:r>
+              <a:rPr sz="1400" b="0">
+                <a:solidFill>
+                  <a:srgbClr val="555555"/>
+                </a:solidFill>
+                <a:latin typeface="Microsoft YaHei"/>
+              </a:rPr>
+              <a:t>高流失风险客户识别准确率达到 80%</a:t>
+            </a:r>
+          </a:p>
+        </p:txBody>
+      </p:sp>
+      <p:sp>
+        <p:nvSpPr>
+          <p:cNvPr id="11" name="Rounded Rectangle 10"/>
+          <p:cNvSpPr/>
+          <p:nvPr/>
+        </p:nvSpPr>
+        <p:spPr>
+          <a:xfrm>
+            <a:off x="8101583" y="1783080"/>
+            <a:ext cx="3246120" cy="4480560"/>
+          </a:xfrm>
+          <a:prstGeom prst="roundRect">
+            <a:avLst>
+              <a:gd name="adj" fmla="val 10000"/>
+            </a:avLst>
+          </a:prstGeom>
+          <a:solidFill>
+            <a:srgbClr val="F8F4F4"/>
+          </a:solidFill>
+          <a:ln w="10160">
+            <a:solidFill>
+              <a:srgbClr val="E9DDDD"/>
+            </a:solidFill>
+          </a:ln>
+        </p:spPr>
+        <p:style>
+          <a:lnRef idx="1">
+            <a:schemeClr val="accent1"/>
+          </a:lnRef>
+          <a:fillRef idx="3">
+            <a:schemeClr val="accent1"/>
+          </a:fillRef>
+          <a:effectRef idx="2">
+            <a:schemeClr val="accent1"/>
+          </a:effectRef>
+          <a:fontRef idx="minor">
+            <a:schemeClr val="lt1"/>
+          </a:fontRef>
+        </p:style>
+        <p:txBody>
+          <a:bodyPr rtlCol="0" anchor="ctr"/>
+          <a:lstStyle/>
+          <a:p>
+            <a:pPr algn="ctr"/>
+          </a:p>
+        </p:txBody>
+      </p:sp>
+      <p:sp>
+        <p:nvSpPr>
+          <p:cNvPr id="12" name="TextBox 11"/>
+          <p:cNvSpPr txBox="1"/>
+          <p:nvPr/>
+        </p:nvSpPr>
+        <p:spPr>
+          <a:xfrm>
+            <a:off x="8302752" y="1993392"/>
+            <a:ext cx="2834640" cy="274320"/>
+          </a:xfrm>
+          <a:prstGeom prst="rect">
+            <a:avLst/>
+          </a:prstGeom>
+          <a:noFill/>
+        </p:spPr>
+        <p:txBody>
+          <a:bodyPr wrap="square" anchor="t">
+            <a:spAutoFit/>
+          </a:bodyPr>
+          <a:lstStyle/>
+          <a:p>
+            <a:pPr algn="l">
+              <a:spcAft>
+                <a:spcPts val="0"/>
+              </a:spcAft>
+            </a:pPr>
+            <a:r>
+              <a:rPr sz="1650" b="1">
+                <a:solidFill>
+                  <a:srgbClr val="C62828"/>
+                </a:solidFill>
+                <a:latin typeface="Microsoft YaHei"/>
+              </a:rPr>
+              <a:t>POC 验证点</a:t>
+            </a:r>
+          </a:p>
+        </p:txBody>
+      </p:sp>
+      <p:sp>
+        <p:nvSpPr>
+          <p:cNvPr id="13" name="TextBox 12"/>
+          <p:cNvSpPr txBox="1"/>
+          <p:nvPr/>
+        </p:nvSpPr>
+        <p:spPr>
+          <a:xfrm>
+            <a:off x="8302752" y="2468880"/>
+            <a:ext cx="2834640" cy="3246120"/>
+          </a:xfrm>
+          <a:prstGeom prst="rect">
+            <a:avLst/>
+          </a:prstGeom>
+          <a:noFill/>
+        </p:spPr>
+        <p:txBody>
+          <a:bodyPr wrap="square" anchor="t">
+            <a:spAutoFit/>
+          </a:bodyPr>
+          <a:lstStyle/>
+          <a:p>
+            <a:pPr algn="l">
+              <a:spcAft>
+                <a:spcPts val="800"/>
+              </a:spcAft>
+            </a:pPr>
+            <a:r>
+              <a:rPr sz="1400" b="0">
+                <a:solidFill>
+                  <a:srgbClr val="555555"/>
+                </a:solidFill>
+                <a:latin typeface="Microsoft YaHei"/>
+              </a:rPr>
+              <a:t>1. 客户分层和流失判断的业务可解释性</a:t>
+            </a:r>
+          </a:p>
+          <a:p>
+            <a:pPr algn="l">
+              <a:spcAft>
+                <a:spcPts val="800"/>
+              </a:spcAft>
+            </a:pPr>
+            <a:r>
+              <a:rPr sz="1400" b="0">
+                <a:solidFill>
+                  <a:srgbClr val="555555"/>
+                </a:solidFill>
+                <a:latin typeface="Microsoft YaHei"/>
+              </a:rPr>
+              <a:t>2. 营销内容与页面生成结果的可用性</a:t>
+            </a:r>
+          </a:p>
+          <a:p>
+            <a:pPr algn="l">
+              <a:spcAft>
+                <a:spcPts val="800"/>
+              </a:spcAft>
+            </a:pPr>
+            <a:r>
+              <a:rPr sz="1400" b="0">
+                <a:solidFill>
+                  <a:srgbClr val="555555"/>
+                </a:solidFill>
+                <a:latin typeface="Microsoft YaHei"/>
+              </a:rPr>
+              <a:t>3. 活动复盘结果对下一轮增长动作的指导价值</a:t>
+            </a:r>
+          </a:p>
+        </p:txBody>
+      </p:sp>
+    </p:spTree>
+  </p:cSld>
+  <p:clrMapOvr>
+    <a:masterClrMapping/>
+  </p:clrMapOvr>
+</p:sld>
+</file>
+
+<file path=ppt/slides/slide11.xml><?xml version="1.0" encoding="utf-8"?>
+<p:sld xmlns:a="http://schemas.openxmlformats.org/drawingml/2006/main" xmlns:p="http://schemas.openxmlformats.org/presentationml/2006/main" xmlns:r="http://schemas.openxmlformats.org/officeDocument/2006/relationships">
+  <p:cSld>
+    <p:bg>
+      <p:bgPr>
+        <a:solidFill>
+          <a:srgbClr val="FFFFFF"/>
+        </a:solidFill>
+        <a:effectLst/>
+      </p:bgPr>
+    </p:bg>
+    <p:spTree>
+      <p:nvGrpSpPr>
+        <p:cNvPr id="1" name=""/>
+        <p:cNvGrpSpPr/>
+        <p:nvPr/>
+      </p:nvGrpSpPr>
+      <p:grpSpPr/>
+      <p:sp>
+        <p:nvSpPr>
+          <p:cNvPr id="2" name="Rectangle 1"/>
+          <p:cNvSpPr/>
+          <p:nvPr/>
+        </p:nvSpPr>
+        <p:spPr>
+          <a:xfrm>
+            <a:off x="548640" y="502920"/>
+            <a:ext cx="109728" cy="822960"/>
+          </a:xfrm>
+          <a:prstGeom prst="rect">
+            <a:avLst/>
+          </a:prstGeom>
+          <a:solidFill>
+            <a:srgbClr val="E91E63"/>
+          </a:solidFill>
+          <a:ln>
+            <a:noFill/>
+          </a:ln>
+        </p:spPr>
+        <p:style>
+          <a:lnRef idx="1">
+            <a:schemeClr val="accent1"/>
+          </a:lnRef>
+          <a:fillRef idx="3">
+            <a:schemeClr val="accent1"/>
+          </a:fillRef>
+          <a:effectRef idx="2">
+            <a:schemeClr val="accent1"/>
+          </a:effectRef>
+          <a:fontRef idx="minor">
+            <a:schemeClr val="lt1"/>
+          </a:fontRef>
+        </p:style>
+        <p:txBody>
+          <a:bodyPr rtlCol="0" anchor="ctr"/>
+          <a:lstStyle/>
+          <a:p>
+            <a:pPr algn="ctr"/>
+          </a:p>
+        </p:txBody>
+      </p:sp>
+      <p:sp>
+        <p:nvSpPr>
+          <p:cNvPr id="3" name="TextBox 2"/>
+          <p:cNvSpPr txBox="1"/>
+          <p:nvPr/>
+        </p:nvSpPr>
+        <p:spPr>
+          <a:xfrm>
+            <a:off x="822960" y="457200"/>
+            <a:ext cx="8046720" cy="640080"/>
+          </a:xfrm>
+          <a:prstGeom prst="rect">
+            <a:avLst/>
+          </a:prstGeom>
+          <a:noFill/>
+        </p:spPr>
+        <p:txBody>
+          <a:bodyPr wrap="square" anchor="t">
+            <a:spAutoFit/>
+          </a:bodyPr>
+          <a:lstStyle/>
+          <a:p>
+            <a:pPr algn="l">
+              <a:spcAft>
+                <a:spcPts val="0"/>
+              </a:spcAft>
+            </a:pPr>
+            <a:r>
+              <a:rPr sz="2400" b="1">
+                <a:solidFill>
+                  <a:srgbClr val="C62828"/>
+                </a:solidFill>
+                <a:latin typeface="Microsoft YaHei"/>
+              </a:rPr>
+              <a:t>POC 与下一步</a:t>
+            </a:r>
+          </a:p>
+        </p:txBody>
+      </p:sp>
+      <p:sp>
+        <p:nvSpPr>
+          <p:cNvPr id="4" name="Rectangle 3"/>
+          <p:cNvSpPr/>
+          <p:nvPr/>
+        </p:nvSpPr>
+        <p:spPr>
+          <a:xfrm>
+            <a:off x="822960" y="1325880"/>
+            <a:ext cx="10515600" cy="27432"/>
+          </a:xfrm>
+          <a:prstGeom prst="rect">
+            <a:avLst/>
+          </a:prstGeom>
+          <a:solidFill>
+            <a:srgbClr val="F3EDED"/>
+          </a:solidFill>
+          <a:ln>
+            <a:noFill/>
+          </a:ln>
+        </p:spPr>
+        <p:style>
+          <a:lnRef idx="1">
+            <a:schemeClr val="accent1"/>
+          </a:lnRef>
+          <a:fillRef idx="3">
+            <a:schemeClr val="accent1"/>
+          </a:fillRef>
+          <a:effectRef idx="2">
+            <a:schemeClr val="accent1"/>
+          </a:effectRef>
+          <a:fontRef idx="minor">
+            <a:schemeClr val="lt1"/>
+          </a:fontRef>
+        </p:style>
+        <p:txBody>
+          <a:bodyPr rtlCol="0" anchor="ctr"/>
+          <a:lstStyle/>
+          <a:p>
+            <a:pPr algn="ctr"/>
+          </a:p>
+        </p:txBody>
+      </p:sp>
+      <p:sp>
+        <p:nvSpPr>
+          <p:cNvPr id="5" name="Rounded Rectangle 4"/>
+          <p:cNvSpPr/>
+          <p:nvPr/>
+        </p:nvSpPr>
+        <p:spPr>
+          <a:xfrm>
+            <a:off x="822960" y="1737360"/>
+            <a:ext cx="10469880" cy="731520"/>
+          </a:xfrm>
+          <a:prstGeom prst="roundRect">
+            <a:avLst>
+              <a:gd name="adj" fmla="val 10000"/>
+            </a:avLst>
+          </a:prstGeom>
+          <a:solidFill>
+            <a:srgbClr val="C62828"/>
+          </a:solidFill>
+          <a:ln>
+            <a:noFill/>
+          </a:ln>
+        </p:spPr>
+        <p:style>
+          <a:lnRef idx="1">
+            <a:schemeClr val="accent1"/>
+          </a:lnRef>
+          <a:fillRef idx="3">
+            <a:schemeClr val="accent1"/>
+          </a:fillRef>
+          <a:effectRef idx="2">
+            <a:schemeClr val="accent1"/>
+          </a:effectRef>
+          <a:fontRef idx="minor">
+            <a:schemeClr val="lt1"/>
+          </a:fontRef>
+        </p:style>
+        <p:txBody>
+          <a:bodyPr rtlCol="0" anchor="ctr"/>
+          <a:lstStyle/>
+          <a:p>
+            <a:pPr algn="ctr"/>
+          </a:p>
+        </p:txBody>
+      </p:sp>
+      <p:sp>
+        <p:nvSpPr>
+          <p:cNvPr id="6" name="TextBox 5"/>
+          <p:cNvSpPr txBox="1"/>
+          <p:nvPr/>
+        </p:nvSpPr>
+        <p:spPr>
+          <a:xfrm>
+            <a:off x="1097280" y="1883664"/>
+            <a:ext cx="1234440" cy="274320"/>
+          </a:xfrm>
+          <a:prstGeom prst="rect">
+            <a:avLst/>
+          </a:prstGeom>
+          <a:noFill/>
+        </p:spPr>
+        <p:txBody>
+          <a:bodyPr wrap="square" anchor="t">
+            <a:spAutoFit/>
+          </a:bodyPr>
+          <a:lstStyle/>
+          <a:p>
+            <a:pPr algn="l">
+              <a:spcAft>
+                <a:spcPts val="0"/>
+              </a:spcAft>
+            </a:pPr>
+            <a:r>
+              <a:rPr sz="1650" b="1">
+                <a:solidFill>
+                  <a:srgbClr val="FFFFFF"/>
+                </a:solidFill>
+                <a:latin typeface="Microsoft YaHei"/>
+              </a:rPr>
+              <a:t>POC 范围</a:t>
+            </a:r>
+          </a:p>
+        </p:txBody>
+      </p:sp>
+      <p:sp>
+        <p:nvSpPr>
+          <p:cNvPr id="7" name="TextBox 6"/>
+          <p:cNvSpPr txBox="1"/>
+          <p:nvPr/>
+        </p:nvSpPr>
+        <p:spPr>
+          <a:xfrm>
+            <a:off x="2103120" y="1874519"/>
+            <a:ext cx="8138160" cy="384048"/>
+          </a:xfrm>
+          <a:prstGeom prst="rect">
+            <a:avLst/>
+          </a:prstGeom>
+          <a:noFill/>
+        </p:spPr>
+        <p:txBody>
+          <a:bodyPr wrap="square" anchor="ctr">
+            <a:spAutoFit/>
+          </a:bodyPr>
+          <a:lstStyle/>
+          <a:p>
+            <a:pPr algn="l">
+              <a:spcAft>
+                <a:spcPts val="0"/>
+              </a:spcAft>
+            </a:pPr>
+            <a:r>
+              <a:rPr sz="1520" b="1">
+                <a:solidFill>
+                  <a:srgbClr val="FFFFFF"/>
+                </a:solidFill>
+                <a:latin typeface="Microsoft YaHei"/>
+              </a:rPr>
+              <a:t>优先验证客户洞察、营销内容生成、活动复盘和流失预警四段闭环</a:t>
+            </a:r>
+          </a:p>
+        </p:txBody>
+      </p:sp>
+      <p:sp>
+        <p:nvSpPr>
+          <p:cNvPr id="8" name="Rounded Rectangle 7"/>
+          <p:cNvSpPr/>
+          <p:nvPr/>
+        </p:nvSpPr>
+        <p:spPr>
+          <a:xfrm>
+            <a:off x="822960" y="2743200"/>
+            <a:ext cx="4983480" cy="3383280"/>
+          </a:xfrm>
+          <a:prstGeom prst="roundRect">
+            <a:avLst>
+              <a:gd name="adj" fmla="val 10000"/>
+            </a:avLst>
+          </a:prstGeom>
+          <a:solidFill>
+            <a:srgbClr val="F8F4F4"/>
+          </a:solidFill>
+          <a:ln w="10160">
+            <a:solidFill>
+              <a:srgbClr val="E9DDDD"/>
+            </a:solidFill>
+          </a:ln>
+        </p:spPr>
+        <p:style>
+          <a:lnRef idx="1">
+            <a:schemeClr val="accent1"/>
+          </a:lnRef>
+          <a:fillRef idx="3">
+            <a:schemeClr val="accent1"/>
+          </a:fillRef>
+          <a:effectRef idx="2">
+            <a:schemeClr val="accent1"/>
+          </a:effectRef>
+          <a:fontRef idx="minor">
+            <a:schemeClr val="lt1"/>
+          </a:fontRef>
+        </p:style>
+        <p:txBody>
+          <a:bodyPr rtlCol="0" anchor="ctr"/>
+          <a:lstStyle/>
+          <a:p>
+            <a:pPr algn="ctr"/>
+          </a:p>
+        </p:txBody>
+      </p:sp>
+      <p:sp>
+        <p:nvSpPr>
+          <p:cNvPr id="9" name="TextBox 8"/>
+          <p:cNvSpPr txBox="1"/>
+          <p:nvPr/>
+        </p:nvSpPr>
+        <p:spPr>
+          <a:xfrm>
+            <a:off x="1097280" y="2971800"/>
+            <a:ext cx="4434840" cy="274320"/>
+          </a:xfrm>
+          <a:prstGeom prst="rect">
+            <a:avLst/>
+          </a:prstGeom>
+          <a:noFill/>
+        </p:spPr>
+        <p:txBody>
+          <a:bodyPr wrap="square" anchor="t">
+            <a:spAutoFit/>
+          </a:bodyPr>
+          <a:lstStyle/>
+          <a:p>
+            <a:pPr algn="l">
+              <a:spcAft>
+                <a:spcPts val="0"/>
+              </a:spcAft>
+            </a:pPr>
+            <a:r>
+              <a:rPr sz="1650" b="1">
+                <a:solidFill>
+                  <a:srgbClr val="C62828"/>
+                </a:solidFill>
+                <a:latin typeface="Microsoft YaHei"/>
+              </a:rPr>
+              <a:t>关键角色</a:t>
+            </a:r>
+          </a:p>
+        </p:txBody>
+      </p:sp>
+      <p:sp>
+        <p:nvSpPr>
+          <p:cNvPr id="10" name="TextBox 9"/>
+          <p:cNvSpPr txBox="1"/>
+          <p:nvPr/>
+        </p:nvSpPr>
+        <p:spPr>
+          <a:xfrm>
+            <a:off x="1097280" y="3474720"/>
+            <a:ext cx="4434840" cy="2148840"/>
+          </a:xfrm>
+          <a:prstGeom prst="rect">
+            <a:avLst/>
+          </a:prstGeom>
+          <a:noFill/>
+        </p:spPr>
+        <p:txBody>
+          <a:bodyPr wrap="square" anchor="t">
+            <a:spAutoFit/>
+          </a:bodyPr>
+          <a:lstStyle/>
+          <a:p>
+            <a:pPr algn="l">
+              <a:spcAft>
+                <a:spcPts val="1000"/>
+              </a:spcAft>
+            </a:pPr>
+            <a:r>
+              <a:rPr sz="1450" b="0">
+                <a:solidFill>
+                  <a:srgbClr val="555555"/>
+                </a:solidFill>
+                <a:latin typeface="Microsoft YaHei"/>
+              </a:rPr>
+              <a:t>营销负责人</a:t>
+            </a:r>
+          </a:p>
+          <a:p>
+            <a:pPr algn="l">
+              <a:spcAft>
+                <a:spcPts val="1000"/>
+              </a:spcAft>
+            </a:pPr>
+            <a:r>
+              <a:rPr sz="1450" b="0">
+                <a:solidFill>
+                  <a:srgbClr val="555555"/>
+                </a:solidFill>
+                <a:latin typeface="Microsoft YaHei"/>
+              </a:rPr>
+              <a:t>CRM 运营负责人</a:t>
+            </a:r>
+          </a:p>
+          <a:p>
+            <a:pPr algn="l">
+              <a:spcAft>
+                <a:spcPts val="1000"/>
+              </a:spcAft>
+            </a:pPr>
+            <a:r>
+              <a:rPr sz="1450" b="0">
+                <a:solidFill>
+                  <a:srgbClr val="555555"/>
+                </a:solidFill>
+                <a:latin typeface="Microsoft YaHei"/>
+              </a:rPr>
+              <a:t>电商业务负责人</a:t>
+            </a:r>
+          </a:p>
+          <a:p>
+            <a:pPr algn="l">
+              <a:spcAft>
+                <a:spcPts val="1000"/>
+              </a:spcAft>
+            </a:pPr>
+            <a:r>
+              <a:rPr sz="1450" b="0">
+                <a:solidFill>
+                  <a:srgbClr val="555555"/>
+                </a:solidFill>
+                <a:latin typeface="Microsoft YaHei"/>
+              </a:rPr>
+              <a:t>数据 / 数字化团队</a:t>
+            </a:r>
+          </a:p>
+        </p:txBody>
+      </p:sp>
+      <p:sp>
+        <p:nvSpPr>
+          <p:cNvPr id="11" name="Rounded Rectangle 10"/>
+          <p:cNvSpPr/>
+          <p:nvPr/>
+        </p:nvSpPr>
+        <p:spPr>
+          <a:xfrm>
+            <a:off x="6309360" y="2743200"/>
+            <a:ext cx="4983480" cy="3383280"/>
+          </a:xfrm>
+          <a:prstGeom prst="roundRect">
+            <a:avLst>
+              <a:gd name="adj" fmla="val 10000"/>
+            </a:avLst>
+          </a:prstGeom>
+          <a:solidFill>
+            <a:srgbClr val="F3EDED"/>
+          </a:solidFill>
+          <a:ln w="10160">
+            <a:solidFill>
+              <a:srgbClr val="E9DDDD"/>
+            </a:solidFill>
+          </a:ln>
+        </p:spPr>
+        <p:style>
+          <a:lnRef idx="1">
+            <a:schemeClr val="accent1"/>
+          </a:lnRef>
+          <a:fillRef idx="3">
+            <a:schemeClr val="accent1"/>
+          </a:fillRef>
+          <a:effectRef idx="2">
+            <a:schemeClr val="accent1"/>
+          </a:effectRef>
+          <a:fontRef idx="minor">
+            <a:schemeClr val="lt1"/>
+          </a:fontRef>
+        </p:style>
+        <p:txBody>
+          <a:bodyPr rtlCol="0" anchor="ctr"/>
+          <a:lstStyle/>
+          <a:p>
+            <a:pPr algn="ctr"/>
+          </a:p>
+        </p:txBody>
+      </p:sp>
+      <p:sp>
+        <p:nvSpPr>
+          <p:cNvPr id="12" name="TextBox 11"/>
+          <p:cNvSpPr txBox="1"/>
+          <p:nvPr/>
+        </p:nvSpPr>
+        <p:spPr>
+          <a:xfrm>
+            <a:off x="6583680" y="2971800"/>
+            <a:ext cx="4434840" cy="274320"/>
+          </a:xfrm>
+          <a:prstGeom prst="rect">
+            <a:avLst/>
+          </a:prstGeom>
+          <a:noFill/>
+        </p:spPr>
+        <p:txBody>
+          <a:bodyPr wrap="square" anchor="t">
+            <a:spAutoFit/>
+          </a:bodyPr>
+          <a:lstStyle/>
+          <a:p>
+            <a:pPr algn="l">
+              <a:spcAft>
+                <a:spcPts val="0"/>
+              </a:spcAft>
+            </a:pPr>
+            <a:r>
+              <a:rPr sz="1650" b="1">
+                <a:solidFill>
+                  <a:srgbClr val="C62828"/>
+                </a:solidFill>
+                <a:latin typeface="Microsoft YaHei"/>
+              </a:rPr>
+              <a:t>后续动作</a:t>
+            </a:r>
+          </a:p>
+        </p:txBody>
+      </p:sp>
+      <p:sp>
+        <p:nvSpPr>
+          <p:cNvPr id="13" name="TextBox 12"/>
+          <p:cNvSpPr txBox="1"/>
+          <p:nvPr/>
+        </p:nvSpPr>
+        <p:spPr>
+          <a:xfrm>
+            <a:off x="6583680" y="3474720"/>
+            <a:ext cx="4434840" cy="2148840"/>
+          </a:xfrm>
+          <a:prstGeom prst="rect">
+            <a:avLst/>
+          </a:prstGeom>
+          <a:noFill/>
+        </p:spPr>
+        <p:txBody>
+          <a:bodyPr wrap="square" anchor="t">
+            <a:spAutoFit/>
+          </a:bodyPr>
+          <a:lstStyle/>
+          <a:p>
+            <a:pPr algn="l">
+              <a:spcAft>
+                <a:spcPts val="1000"/>
+              </a:spcAft>
+            </a:pPr>
+            <a:r>
+              <a:rPr sz="1450" b="0">
+                <a:solidFill>
+                  <a:srgbClr val="555555"/>
+                </a:solidFill>
+                <a:latin typeface="Microsoft YaHei"/>
+              </a:rPr>
+              <a:t>1. 确认一个重点国家站点和一类目标客群作为试点</a:t>
+            </a:r>
+          </a:p>
+          <a:p>
+            <a:pPr algn="l">
+              <a:spcAft>
+                <a:spcPts val="1000"/>
+              </a:spcAft>
+            </a:pPr>
+            <a:r>
+              <a:rPr sz="1450" b="0">
+                <a:solidFill>
+                  <a:srgbClr val="555555"/>
+                </a:solidFill>
+                <a:latin typeface="Microsoft YaHei"/>
+              </a:rPr>
+              <a:t>2. 准备客户画像、活动结果和流失样本数据</a:t>
+            </a:r>
+          </a:p>
+          <a:p>
+            <a:pPr algn="l">
+              <a:spcAft>
+                <a:spcPts val="1000"/>
+              </a:spcAft>
+            </a:pPr>
+            <a:r>
+              <a:rPr sz="1450" b="0">
+                <a:solidFill>
+                  <a:srgbClr val="555555"/>
+                </a:solidFill>
+                <a:latin typeface="Microsoft YaHei"/>
+              </a:rPr>
+              <a:t>3. 两周内完成工作台原型与验证口径</a:t>
             </a:r>
           </a:p>
         </p:txBody>
@@ -4760,7 +6554,7 @@
                 </a:solidFill>
                 <a:latin typeface="Microsoft YaHei"/>
               </a:rPr>
-              <a:t>跨界电商企业最容易快速验证价值的切口，不是重建整个平台，而是先把客户洞察、内容生产和增长动作串起来。</a:t>
+              <a:t>对跨界电商品牌来说，最有价值的切入口不是一次性重做营销系统，而是先把客户洞察、内容生产和 retention 动作串成闭环。</a:t>
             </a:r>
           </a:p>
         </p:txBody>
@@ -4885,7 +6679,7 @@
                 </a:solidFill>
                 <a:latin typeface="Microsoft YaHei"/>
               </a:rPr>
-              <a:t>客户数据和营销动作已经在线化，但组织里往往缺少一个把洞察、内容和执行真正打通的 AI 工作流。</a:t>
+              <a:t>客户画像、活动数据和内容资产已经逐步数字化，但从洞察到执行仍依赖人工衔接，正适合用 AI 在最短路径上验证增长价值。</a:t>
             </a:r>
           </a:p>
         </p:txBody>
@@ -5010,7 +6804,7 @@
                 </a:solidFill>
                 <a:latin typeface="Microsoft YaHei"/>
               </a:rPr>
-              <a:t>增长团队面对多区域、多语言和多渠道内容压力</a:t>
+              <a:t>多站点、多客群、多活动并行时，人工内容生产和活动编排难以跟上增长节奏</a:t>
             </a:r>
           </a:p>
         </p:txBody>
@@ -5286,7 +7080,7 @@
                 </a:solidFill>
                 <a:latin typeface="Microsoft YaHei"/>
               </a:rPr>
-              <a:t>1. 团队汇总客户画像、历史活动与渠道表现数据</a:t>
+              <a:t>1. 汇总客户画像、活动数据和渠道反馈，识别目标客群与重点活动机会</a:t>
             </a:r>
           </a:p>
           <a:p>
@@ -5302,7 +7096,7 @@
                 </a:solidFill>
                 <a:latin typeface="Microsoft YaHei"/>
               </a:rPr>
-              <a:t>2. 人工判断细分客群与营销方向</a:t>
+              <a:t>2. 营销团队基于经验制定活动策略与个性化内容方向</a:t>
             </a:r>
           </a:p>
           <a:p>
@@ -5318,7 +7112,7 @@
                 </a:solidFill>
                 <a:latin typeface="Microsoft YaHei"/>
               </a:rPr>
-              <a:t>3. 分别制作文案、素材和页面内容</a:t>
+              <a:t>3. 人工生成文案、素材和活动页面内容，并反复协调修改</a:t>
             </a:r>
           </a:p>
           <a:p>
@@ -5334,7 +7128,7 @@
                 </a:solidFill>
                 <a:latin typeface="Microsoft YaHei"/>
               </a:rPr>
-              <a:t>4. 活动上线后人工复盘效果</a:t>
+              <a:t>4. 活动上线后再人工整理经营数据做复盘分析</a:t>
             </a:r>
           </a:p>
         </p:txBody>
@@ -5459,7 +7253,7 @@
                 </a:solidFill>
                 <a:latin typeface="Microsoft YaHei"/>
               </a:rPr>
-              <a:t>1. 内容生产和活动复盘周期长，流失预警不及时。</a:t>
+              <a:t>1. 客户洞察、内容生产和活动执行之间链路长，营销准备周期难以下降</a:t>
             </a:r>
           </a:p>
           <a:p>
@@ -5475,7 +7269,7 @@
                 </a:solidFill>
                 <a:latin typeface="Microsoft YaHei"/>
               </a:rPr>
-              <a:t>2. 客户洞察、内容制作和活动执行分散在多个环节</a:t>
+              <a:t>2. 活动复盘依赖人工汇总，洞察难以及时回流到下一轮增长动作</a:t>
             </a:r>
           </a:p>
           <a:p>
@@ -5491,7 +7285,7 @@
                 </a:solidFill>
                 <a:latin typeface="Microsoft YaHei"/>
               </a:rPr>
-              <a:t>3. 营销活动上线前准备周期长，试错成本高</a:t>
+              <a:t>3. 流失预警不及时，客户保留动作通常发生在风险已经放大之后</a:t>
             </a:r>
           </a:p>
         </p:txBody>
@@ -5575,7 +7369,7 @@
                 </a:solidFill>
                 <a:latin typeface="Microsoft YaHei"/>
               </a:rPr>
-              <a:t>优先切口：内容生产和活动复盘周期长，流失预警不及时。</a:t>
+              <a:t>优先切口：客户洞察、内容生产和活动执行之间链路长，营销准备周期难以下降</a:t>
             </a:r>
           </a:p>
         </p:txBody>
@@ -5871,7 +7665,7 @@
         <p:spPr>
           <a:xfrm>
             <a:off x="2103120" y="1993392"/>
-            <a:ext cx="1333500" cy="658368"/>
+            <a:ext cx="1572768" cy="658368"/>
           </a:xfrm>
           <a:prstGeom prst="roundRect">
             <a:avLst>
@@ -5918,7 +7712,7 @@
         <p:spPr>
           <a:xfrm>
             <a:off x="2231136" y="2103120"/>
-            <a:ext cx="1077468" cy="384048"/>
+            <a:ext cx="1316736" cy="384048"/>
           </a:xfrm>
           <a:prstGeom prst="rect">
             <a:avLst/>
@@ -5956,7 +7750,7 @@
         </p:nvSpPr>
         <p:spPr>
           <a:xfrm>
-            <a:off x="3464051" y="2176272"/>
+            <a:off x="3703320" y="2176272"/>
             <a:ext cx="237744" cy="237744"/>
           </a:xfrm>
           <a:prstGeom prst="rightArrow">
@@ -5999,8 +7793,8 @@
         </p:nvSpPr>
         <p:spPr>
           <a:xfrm>
-            <a:off x="3637787" y="1993392"/>
-            <a:ext cx="1333500" cy="658368"/>
+            <a:off x="3877056" y="1993392"/>
+            <a:ext cx="1572768" cy="658368"/>
           </a:xfrm>
           <a:prstGeom prst="roundRect">
             <a:avLst>
@@ -6046,8 +7840,8 @@
         </p:nvSpPr>
         <p:spPr>
           <a:xfrm>
-            <a:off x="3765804" y="2103120"/>
-            <a:ext cx="1077468" cy="384048"/>
+            <a:off x="4005072" y="2103120"/>
+            <a:ext cx="1316736" cy="384048"/>
           </a:xfrm>
           <a:prstGeom prst="rect">
             <a:avLst/>
@@ -6072,24 +7866,26 @@
                 </a:solidFill>
                 <a:latin typeface="Microsoft YaHei"/>
               </a:rPr>
-              <a:t>了解客户</a:t>
-            </a:r>
-          </a:p>
-        </p:txBody>
-      </p:sp>
-      <p:sp>
-        <p:nvSpPr>
-          <p:cNvPr id="13" name="Right Arrow 12"/>
+              <a:t>表单理解</a:t>
+            </a:r>
+          </a:p>
+        </p:txBody>
+      </p:sp>
+      <p:sp>
+        <p:nvSpPr>
+          <p:cNvPr id="13" name="Rounded Rectangle 12"/>
           <p:cNvSpPr/>
           <p:nvPr/>
         </p:nvSpPr>
         <p:spPr>
           <a:xfrm>
-            <a:off x="4998720" y="2176272"/>
-            <a:ext cx="237744" cy="237744"/>
-          </a:xfrm>
-          <a:prstGeom prst="rightArrow">
-            <a:avLst/>
+            <a:off x="868680" y="3310128"/>
+            <a:ext cx="1051560" cy="658368"/>
+          </a:xfrm>
+          <a:prstGeom prst="roundRect">
+            <a:avLst>
+              <a:gd name="adj" fmla="val 10000"/>
+            </a:avLst>
           </a:prstGeom>
           <a:solidFill>
             <a:srgbClr val="E91E63"/>
@@ -6122,14 +7918,53 @@
       </p:sp>
       <p:sp>
         <p:nvSpPr>
-          <p:cNvPr id="14" name="Rounded Rectangle 13"/>
+          <p:cNvPr id="14" name="TextBox 13"/>
+          <p:cNvSpPr txBox="1"/>
+          <p:nvPr/>
+        </p:nvSpPr>
+        <p:spPr>
+          <a:xfrm>
+            <a:off x="1005840" y="3410712"/>
+            <a:ext cx="749808" cy="420624"/>
+          </a:xfrm>
+          <a:prstGeom prst="rect">
+            <a:avLst/>
+          </a:prstGeom>
+          <a:noFill/>
+        </p:spPr>
+        <p:txBody>
+          <a:bodyPr wrap="square" anchor="ctr">
+            <a:spAutoFit/>
+          </a:bodyPr>
+          <a:lstStyle/>
+          <a:p>
+            <a:pPr algn="ctr">
+              <a:spcAft>
+                <a:spcPts val="0"/>
+              </a:spcAft>
+            </a:pPr>
+            <a:r>
+              <a:rPr sz="1200" b="1">
+                <a:solidFill>
+                  <a:srgbClr val="FFFFFF"/>
+                </a:solidFill>
+                <a:latin typeface="Microsoft YaHei"/>
+              </a:rPr>
+              <a:t>理解分析</a:t>
+            </a:r>
+          </a:p>
+        </p:txBody>
+      </p:sp>
+      <p:sp>
+        <p:nvSpPr>
+          <p:cNvPr id="15" name="Rounded Rectangle 14"/>
           <p:cNvSpPr/>
           <p:nvPr/>
         </p:nvSpPr>
         <p:spPr>
           <a:xfrm>
-            <a:off x="5172456" y="1993392"/>
-            <a:ext cx="1333500" cy="658368"/>
+            <a:off x="2103120" y="3310128"/>
+            <a:ext cx="1572768" cy="658368"/>
           </a:xfrm>
           <a:prstGeom prst="roundRect">
             <a:avLst>
@@ -6169,14 +8004,14 @@
       </p:sp>
       <p:sp>
         <p:nvSpPr>
-          <p:cNvPr id="15" name="TextBox 14"/>
+          <p:cNvPr id="16" name="TextBox 15"/>
           <p:cNvSpPr txBox="1"/>
           <p:nvPr/>
         </p:nvSpPr>
         <p:spPr>
           <a:xfrm>
-            <a:off x="5300471" y="2103120"/>
-            <a:ext cx="1077468" cy="384048"/>
+            <a:off x="2231136" y="3419856"/>
+            <a:ext cx="1316736" cy="384048"/>
           </a:xfrm>
           <a:prstGeom prst="rect">
             <a:avLst/>
@@ -6201,20 +8036,20 @@
                 </a:solidFill>
                 <a:latin typeface="Microsoft YaHei"/>
               </a:rPr>
-              <a:t>个性化营销</a:t>
-            </a:r>
-          </a:p>
-        </p:txBody>
-      </p:sp>
-      <p:sp>
-        <p:nvSpPr>
-          <p:cNvPr id="16" name="Right Arrow 15"/>
+              <a:t>客户洞察</a:t>
+            </a:r>
+          </a:p>
+        </p:txBody>
+      </p:sp>
+      <p:sp>
+        <p:nvSpPr>
+          <p:cNvPr id="17" name="Right Arrow 16"/>
           <p:cNvSpPr/>
           <p:nvPr/>
         </p:nvSpPr>
         <p:spPr>
           <a:xfrm>
-            <a:off x="6533388" y="2176272"/>
+            <a:off x="3703320" y="3493008"/>
             <a:ext cx="237744" cy="237744"/>
           </a:xfrm>
           <a:prstGeom prst="rightArrow">
@@ -6251,14 +8086,14 @@
       </p:sp>
       <p:sp>
         <p:nvSpPr>
-          <p:cNvPr id="17" name="Rounded Rectangle 16"/>
+          <p:cNvPr id="18" name="Rounded Rectangle 17"/>
           <p:cNvSpPr/>
           <p:nvPr/>
         </p:nvSpPr>
         <p:spPr>
           <a:xfrm>
-            <a:off x="6707124" y="1993392"/>
-            <a:ext cx="1333500" cy="658368"/>
+            <a:off x="3877056" y="3310128"/>
+            <a:ext cx="1572768" cy="658368"/>
           </a:xfrm>
           <a:prstGeom prst="roundRect">
             <a:avLst>
@@ -6298,14 +8133,14 @@
       </p:sp>
       <p:sp>
         <p:nvSpPr>
-          <p:cNvPr id="18" name="TextBox 17"/>
+          <p:cNvPr id="19" name="TextBox 18"/>
           <p:cNvSpPr txBox="1"/>
           <p:nvPr/>
         </p:nvSpPr>
         <p:spPr>
           <a:xfrm>
-            <a:off x="6835140" y="2103120"/>
-            <a:ext cx="1077468" cy="384048"/>
+            <a:off x="4005072" y="3419856"/>
+            <a:ext cx="1316736" cy="384048"/>
           </a:xfrm>
           <a:prstGeom prst="rect">
             <a:avLst/>
@@ -6330,20 +8165,20 @@
                 </a:solidFill>
                 <a:latin typeface="Microsoft YaHei"/>
               </a:rPr>
-              <a:t>表单理解</a:t>
-            </a:r>
-          </a:p>
-        </p:txBody>
-      </p:sp>
-      <p:sp>
-        <p:nvSpPr>
-          <p:cNvPr id="19" name="Right Arrow 18"/>
+              <a:t>数据分析</a:t>
+            </a:r>
+          </a:p>
+        </p:txBody>
+      </p:sp>
+      <p:sp>
+        <p:nvSpPr>
+          <p:cNvPr id="20" name="Right Arrow 19"/>
           <p:cNvSpPr/>
           <p:nvPr/>
         </p:nvSpPr>
         <p:spPr>
           <a:xfrm>
-            <a:off x="8068055" y="2176272"/>
+            <a:off x="5477256" y="3493008"/>
             <a:ext cx="237744" cy="237744"/>
           </a:xfrm>
           <a:prstGeom prst="rightArrow">
@@ -6380,14 +8215,14 @@
       </p:sp>
       <p:sp>
         <p:nvSpPr>
-          <p:cNvPr id="20" name="Rounded Rectangle 19"/>
+          <p:cNvPr id="21" name="Rounded Rectangle 20"/>
           <p:cNvSpPr/>
           <p:nvPr/>
         </p:nvSpPr>
         <p:spPr>
           <a:xfrm>
-            <a:off x="8241791" y="1993392"/>
-            <a:ext cx="1333500" cy="658368"/>
+            <a:off x="5650992" y="3310128"/>
+            <a:ext cx="1572768" cy="658368"/>
           </a:xfrm>
           <a:prstGeom prst="roundRect">
             <a:avLst>
@@ -6427,14 +8262,14 @@
       </p:sp>
       <p:sp>
         <p:nvSpPr>
-          <p:cNvPr id="21" name="TextBox 20"/>
+          <p:cNvPr id="22" name="TextBox 21"/>
           <p:cNvSpPr txBox="1"/>
           <p:nvPr/>
         </p:nvSpPr>
         <p:spPr>
           <a:xfrm>
-            <a:off x="8369807" y="2103120"/>
-            <a:ext cx="1077468" cy="384048"/>
+            <a:off x="5779007" y="3419856"/>
+            <a:ext cx="1316736" cy="384048"/>
           </a:xfrm>
           <a:prstGeom prst="rect">
             <a:avLst/>
@@ -6459,27 +8294,29 @@
                 </a:solidFill>
                 <a:latin typeface="Microsoft YaHei"/>
               </a:rPr>
-              <a:t>文本输入</a:t>
-            </a:r>
-          </a:p>
-        </p:txBody>
-      </p:sp>
-      <p:sp>
-        <p:nvSpPr>
-          <p:cNvPr id="22" name="Right Arrow 21"/>
+              <a:t>风险预测</a:t>
+            </a:r>
+          </a:p>
+        </p:txBody>
+      </p:sp>
+      <p:sp>
+        <p:nvSpPr>
+          <p:cNvPr id="23" name="Rounded Rectangle 22"/>
           <p:cNvSpPr/>
           <p:nvPr/>
         </p:nvSpPr>
         <p:spPr>
           <a:xfrm>
-            <a:off x="9602723" y="2176272"/>
-            <a:ext cx="237744" cy="237744"/>
-          </a:xfrm>
-          <a:prstGeom prst="rightArrow">
-            <a:avLst/>
+            <a:off x="868680" y="4626864"/>
+            <a:ext cx="1051560" cy="658368"/>
+          </a:xfrm>
+          <a:prstGeom prst="roundRect">
+            <a:avLst>
+              <a:gd name="adj" fmla="val 10000"/>
+            </a:avLst>
           </a:prstGeom>
           <a:solidFill>
-            <a:srgbClr val="E91E63"/>
+            <a:srgbClr val="C62828"/>
           </a:solidFill>
           <a:ln>
             <a:noFill/>
@@ -6509,13 +8346,52 @@
       </p:sp>
       <p:sp>
         <p:nvSpPr>
-          <p:cNvPr id="23" name="Rounded Rectangle 22"/>
+          <p:cNvPr id="24" name="TextBox 23"/>
+          <p:cNvSpPr txBox="1"/>
+          <p:nvPr/>
+        </p:nvSpPr>
+        <p:spPr>
+          <a:xfrm>
+            <a:off x="1005840" y="4727448"/>
+            <a:ext cx="749808" cy="420624"/>
+          </a:xfrm>
+          <a:prstGeom prst="rect">
+            <a:avLst/>
+          </a:prstGeom>
+          <a:noFill/>
+        </p:spPr>
+        <p:txBody>
+          <a:bodyPr wrap="square" anchor="ctr">
+            <a:spAutoFit/>
+          </a:bodyPr>
+          <a:lstStyle/>
+          <a:p>
+            <a:pPr algn="ctr">
+              <a:spcAft>
+                <a:spcPts val="0"/>
+              </a:spcAft>
+            </a:pPr>
+            <a:r>
+              <a:rPr sz="1200" b="1">
+                <a:solidFill>
+                  <a:srgbClr val="FFFFFF"/>
+                </a:solidFill>
+                <a:latin typeface="Microsoft YaHei"/>
+              </a:rPr>
+              <a:t>生成交互 / 执行闭环</a:t>
+            </a:r>
+          </a:p>
+        </p:txBody>
+      </p:sp>
+      <p:sp>
+        <p:nvSpPr>
+          <p:cNvPr id="25" name="Rounded Rectangle 24"/>
           <p:cNvSpPr/>
           <p:nvPr/>
         </p:nvSpPr>
         <p:spPr>
           <a:xfrm>
-            <a:off x="9776460" y="1993392"/>
+            <a:off x="2103120" y="4626864"/>
             <a:ext cx="1333500" cy="658368"/>
           </a:xfrm>
           <a:prstGeom prst="roundRect">
@@ -6556,13 +8432,13 @@
       </p:sp>
       <p:sp>
         <p:nvSpPr>
-          <p:cNvPr id="24" name="TextBox 23"/>
+          <p:cNvPr id="26" name="TextBox 25"/>
           <p:cNvSpPr txBox="1"/>
           <p:nvPr/>
         </p:nvSpPr>
         <p:spPr>
           <a:xfrm>
-            <a:off x="9904476" y="2103120"/>
+            <a:off x="2231136" y="4736592"/>
             <a:ext cx="1077468" cy="384048"/>
           </a:xfrm>
           <a:prstGeom prst="rect">
@@ -6588,26 +8464,24 @@
                 </a:solidFill>
                 <a:latin typeface="Microsoft YaHei"/>
               </a:rPr>
-              <a:t>数据输入</a:t>
-            </a:r>
-          </a:p>
-        </p:txBody>
-      </p:sp>
-      <p:sp>
-        <p:nvSpPr>
-          <p:cNvPr id="25" name="Rounded Rectangle 24"/>
+              <a:t>文本生成</a:t>
+            </a:r>
+          </a:p>
+        </p:txBody>
+      </p:sp>
+      <p:sp>
+        <p:nvSpPr>
+          <p:cNvPr id="27" name="Right Arrow 26"/>
           <p:cNvSpPr/>
           <p:nvPr/>
         </p:nvSpPr>
         <p:spPr>
           <a:xfrm>
-            <a:off x="868680" y="3310128"/>
-            <a:ext cx="1051560" cy="658368"/>
-          </a:xfrm>
-          <a:prstGeom prst="roundRect">
-            <a:avLst>
-              <a:gd name="adj" fmla="val 10000"/>
-            </a:avLst>
+            <a:off x="3464051" y="4809744"/>
+            <a:ext cx="237744" cy="237744"/>
+          </a:xfrm>
+          <a:prstGeom prst="rightArrow">
+            <a:avLst/>
           </a:prstGeom>
           <a:solidFill>
             <a:srgbClr val="E91E63"/>
@@ -6640,53 +8514,14 @@
       </p:sp>
       <p:sp>
         <p:nvSpPr>
-          <p:cNvPr id="26" name="TextBox 25"/>
-          <p:cNvSpPr txBox="1"/>
-          <p:nvPr/>
-        </p:nvSpPr>
-        <p:spPr>
-          <a:xfrm>
-            <a:off x="1005840" y="3410712"/>
-            <a:ext cx="749808" cy="420624"/>
-          </a:xfrm>
-          <a:prstGeom prst="rect">
-            <a:avLst/>
-          </a:prstGeom>
-          <a:noFill/>
-        </p:spPr>
-        <p:txBody>
-          <a:bodyPr wrap="square" anchor="ctr">
-            <a:spAutoFit/>
-          </a:bodyPr>
-          <a:lstStyle/>
-          <a:p>
-            <a:pPr algn="ctr">
-              <a:spcAft>
-                <a:spcPts val="0"/>
-              </a:spcAft>
-            </a:pPr>
-            <a:r>
-              <a:rPr sz="1200" b="1">
-                <a:solidFill>
-                  <a:srgbClr val="FFFFFF"/>
-                </a:solidFill>
-                <a:latin typeface="Microsoft YaHei"/>
-              </a:rPr>
-              <a:t>理解分析</a:t>
-            </a:r>
-          </a:p>
-        </p:txBody>
-      </p:sp>
-      <p:sp>
-        <p:nvSpPr>
-          <p:cNvPr id="27" name="Rounded Rectangle 26"/>
+          <p:cNvPr id="28" name="Rounded Rectangle 27"/>
           <p:cNvSpPr/>
           <p:nvPr/>
         </p:nvSpPr>
         <p:spPr>
           <a:xfrm>
-            <a:off x="2103120" y="3310128"/>
-            <a:ext cx="1572768" cy="658368"/>
+            <a:off x="3637787" y="4626864"/>
+            <a:ext cx="1333500" cy="658368"/>
           </a:xfrm>
           <a:prstGeom prst="roundRect">
             <a:avLst>
@@ -6726,14 +8561,14 @@
       </p:sp>
       <p:sp>
         <p:nvSpPr>
-          <p:cNvPr id="28" name="TextBox 27"/>
+          <p:cNvPr id="29" name="TextBox 28"/>
           <p:cNvSpPr txBox="1"/>
           <p:nvPr/>
         </p:nvSpPr>
         <p:spPr>
           <a:xfrm>
-            <a:off x="2231136" y="3419856"/>
-            <a:ext cx="1316736" cy="384048"/>
+            <a:off x="3765804" y="4736592"/>
+            <a:ext cx="1077468" cy="384048"/>
           </a:xfrm>
           <a:prstGeom prst="rect">
             <a:avLst/>
@@ -6758,20 +8593,20 @@
                 </a:solidFill>
                 <a:latin typeface="Microsoft YaHei"/>
               </a:rPr>
-              <a:t>客户洞察</a:t>
-            </a:r>
-          </a:p>
-        </p:txBody>
-      </p:sp>
-      <p:sp>
-        <p:nvSpPr>
-          <p:cNvPr id="29" name="Right Arrow 28"/>
+              <a:t>网页生成</a:t>
+            </a:r>
+          </a:p>
+        </p:txBody>
+      </p:sp>
+      <p:sp>
+        <p:nvSpPr>
+          <p:cNvPr id="30" name="Right Arrow 29"/>
           <p:cNvSpPr/>
           <p:nvPr/>
         </p:nvSpPr>
         <p:spPr>
           <a:xfrm>
-            <a:off x="3703320" y="3493008"/>
+            <a:off x="4998720" y="4809744"/>
             <a:ext cx="237744" cy="237744"/>
           </a:xfrm>
           <a:prstGeom prst="rightArrow">
@@ -6808,14 +8643,14 @@
       </p:sp>
       <p:sp>
         <p:nvSpPr>
-          <p:cNvPr id="30" name="Rounded Rectangle 29"/>
+          <p:cNvPr id="31" name="Rounded Rectangle 30"/>
           <p:cNvSpPr/>
           <p:nvPr/>
         </p:nvSpPr>
         <p:spPr>
           <a:xfrm>
-            <a:off x="3877056" y="3310128"/>
-            <a:ext cx="1572768" cy="658368"/>
+            <a:off x="5172456" y="4626864"/>
+            <a:ext cx="1333500" cy="658368"/>
           </a:xfrm>
           <a:prstGeom prst="roundRect">
             <a:avLst>
@@ -6855,14 +8690,14 @@
       </p:sp>
       <p:sp>
         <p:nvSpPr>
-          <p:cNvPr id="31" name="TextBox 30"/>
+          <p:cNvPr id="32" name="TextBox 31"/>
           <p:cNvSpPr txBox="1"/>
           <p:nvPr/>
         </p:nvSpPr>
         <p:spPr>
           <a:xfrm>
-            <a:off x="4005072" y="3419856"/>
-            <a:ext cx="1316736" cy="384048"/>
+            <a:off x="5300471" y="4736592"/>
+            <a:ext cx="1077468" cy="384048"/>
           </a:xfrm>
           <a:prstGeom prst="rect">
             <a:avLst/>
@@ -6887,20 +8722,20 @@
                 </a:solidFill>
                 <a:latin typeface="Microsoft YaHei"/>
               </a:rPr>
-              <a:t>数据分析</a:t>
-            </a:r>
-          </a:p>
-        </p:txBody>
-      </p:sp>
-      <p:sp>
-        <p:nvSpPr>
-          <p:cNvPr id="32" name="Right Arrow 31"/>
+              <a:t>营销内容生成</a:t>
+            </a:r>
+          </a:p>
+        </p:txBody>
+      </p:sp>
+      <p:sp>
+        <p:nvSpPr>
+          <p:cNvPr id="33" name="Right Arrow 32"/>
           <p:cNvSpPr/>
           <p:nvPr/>
         </p:nvSpPr>
         <p:spPr>
           <a:xfrm>
-            <a:off x="5477256" y="3493008"/>
+            <a:off x="6533388" y="4809744"/>
             <a:ext cx="237744" cy="237744"/>
           </a:xfrm>
           <a:prstGeom prst="rightArrow">
@@ -6937,14 +8772,14 @@
       </p:sp>
       <p:sp>
         <p:nvSpPr>
-          <p:cNvPr id="33" name="Rounded Rectangle 32"/>
+          <p:cNvPr id="34" name="Rounded Rectangle 33"/>
           <p:cNvSpPr/>
           <p:nvPr/>
         </p:nvSpPr>
         <p:spPr>
           <a:xfrm>
-            <a:off x="5650992" y="3310128"/>
-            <a:ext cx="1572768" cy="658368"/>
+            <a:off x="6707124" y="4626864"/>
+            <a:ext cx="1333500" cy="658368"/>
           </a:xfrm>
           <a:prstGeom prst="roundRect">
             <a:avLst>
@@ -6984,14 +8819,14 @@
       </p:sp>
       <p:sp>
         <p:nvSpPr>
-          <p:cNvPr id="34" name="TextBox 33"/>
+          <p:cNvPr id="35" name="TextBox 34"/>
           <p:cNvSpPr txBox="1"/>
           <p:nvPr/>
         </p:nvSpPr>
         <p:spPr>
           <a:xfrm>
-            <a:off x="5779007" y="3419856"/>
-            <a:ext cx="1316736" cy="384048"/>
+            <a:off x="6835140" y="4736592"/>
+            <a:ext cx="1077468" cy="384048"/>
           </a:xfrm>
           <a:prstGeom prst="rect">
             <a:avLst/>
@@ -7016,20 +8851,20 @@
                 </a:solidFill>
                 <a:latin typeface="Microsoft YaHei"/>
               </a:rPr>
-              <a:t>风险预测</a:t>
-            </a:r>
-          </a:p>
-        </p:txBody>
-      </p:sp>
-      <p:sp>
-        <p:nvSpPr>
-          <p:cNvPr id="35" name="Right Arrow 34"/>
+              <a:t>流程优化</a:t>
+            </a:r>
+          </a:p>
+        </p:txBody>
+      </p:sp>
+      <p:sp>
+        <p:nvSpPr>
+          <p:cNvPr id="36" name="Right Arrow 35"/>
           <p:cNvSpPr/>
           <p:nvPr/>
         </p:nvSpPr>
         <p:spPr>
           <a:xfrm>
-            <a:off x="7251192" y="3493008"/>
+            <a:off x="8068055" y="4809744"/>
             <a:ext cx="237744" cy="237744"/>
           </a:xfrm>
           <a:prstGeom prst="rightArrow">
@@ -7066,14 +8901,14 @@
       </p:sp>
       <p:sp>
         <p:nvSpPr>
-          <p:cNvPr id="36" name="Rounded Rectangle 35"/>
+          <p:cNvPr id="37" name="Rounded Rectangle 36"/>
           <p:cNvSpPr/>
           <p:nvPr/>
         </p:nvSpPr>
         <p:spPr>
           <a:xfrm>
-            <a:off x="7424928" y="3310128"/>
-            <a:ext cx="1572768" cy="658368"/>
+            <a:off x="8241791" y="4626864"/>
+            <a:ext cx="1333500" cy="658368"/>
           </a:xfrm>
           <a:prstGeom prst="roundRect">
             <a:avLst>
@@ -7113,14 +8948,14 @@
       </p:sp>
       <p:sp>
         <p:nvSpPr>
-          <p:cNvPr id="37" name="TextBox 36"/>
+          <p:cNvPr id="38" name="TextBox 37"/>
           <p:cNvSpPr txBox="1"/>
           <p:nvPr/>
         </p:nvSpPr>
         <p:spPr>
           <a:xfrm>
-            <a:off x="7552944" y="3419856"/>
-            <a:ext cx="1316736" cy="384048"/>
+            <a:off x="8369807" y="4736592"/>
+            <a:ext cx="1077468" cy="384048"/>
           </a:xfrm>
           <a:prstGeom prst="rect">
             <a:avLst/>
@@ -7145,29 +8980,27 @@
                 </a:solidFill>
                 <a:latin typeface="Microsoft YaHei"/>
               </a:rPr>
-              <a:t>预测客户流失</a:t>
-            </a:r>
-          </a:p>
-        </p:txBody>
-      </p:sp>
-      <p:sp>
-        <p:nvSpPr>
-          <p:cNvPr id="38" name="Rounded Rectangle 37"/>
+              <a:t>自动履行</a:t>
+            </a:r>
+          </a:p>
+        </p:txBody>
+      </p:sp>
+      <p:sp>
+        <p:nvSpPr>
+          <p:cNvPr id="39" name="Right Arrow 38"/>
           <p:cNvSpPr/>
           <p:nvPr/>
         </p:nvSpPr>
         <p:spPr>
           <a:xfrm>
-            <a:off x="868680" y="4626864"/>
-            <a:ext cx="1051560" cy="658368"/>
-          </a:xfrm>
-          <a:prstGeom prst="roundRect">
-            <a:avLst>
-              <a:gd name="adj" fmla="val 10000"/>
-            </a:avLst>
+            <a:off x="9602723" y="4809744"/>
+            <a:ext cx="237744" cy="237744"/>
+          </a:xfrm>
+          <a:prstGeom prst="rightArrow">
+            <a:avLst/>
           </a:prstGeom>
           <a:solidFill>
-            <a:srgbClr val="C62828"/>
+            <a:srgbClr val="E91E63"/>
           </a:solidFill>
           <a:ln>
             <a:noFill/>
@@ -7197,53 +9030,14 @@
       </p:sp>
       <p:sp>
         <p:nvSpPr>
-          <p:cNvPr id="39" name="TextBox 38"/>
-          <p:cNvSpPr txBox="1"/>
-          <p:nvPr/>
-        </p:nvSpPr>
-        <p:spPr>
-          <a:xfrm>
-            <a:off x="1005840" y="4727448"/>
-            <a:ext cx="749808" cy="420624"/>
-          </a:xfrm>
-          <a:prstGeom prst="rect">
-            <a:avLst/>
-          </a:prstGeom>
-          <a:noFill/>
-        </p:spPr>
-        <p:txBody>
-          <a:bodyPr wrap="square" anchor="ctr">
-            <a:spAutoFit/>
-          </a:bodyPr>
-          <a:lstStyle/>
-          <a:p>
-            <a:pPr algn="ctr">
-              <a:spcAft>
-                <a:spcPts val="0"/>
-              </a:spcAft>
-            </a:pPr>
-            <a:r>
-              <a:rPr sz="1200" b="1">
-                <a:solidFill>
-                  <a:srgbClr val="FFFFFF"/>
-                </a:solidFill>
-                <a:latin typeface="Microsoft YaHei"/>
-              </a:rPr>
-              <a:t>生成交互 / 执行闭环</a:t>
-            </a:r>
-          </a:p>
-        </p:txBody>
-      </p:sp>
-      <p:sp>
-        <p:nvSpPr>
           <p:cNvPr id="40" name="Rounded Rectangle 39"/>
           <p:cNvSpPr/>
           <p:nvPr/>
         </p:nvSpPr>
         <p:spPr>
           <a:xfrm>
-            <a:off x="2103120" y="4626864"/>
-            <a:ext cx="949832" cy="658368"/>
+            <a:off x="9776460" y="4626864"/>
+            <a:ext cx="1333500" cy="658368"/>
           </a:xfrm>
           <a:prstGeom prst="roundRect">
             <a:avLst>
@@ -7289,8 +9083,8 @@
         </p:nvSpPr>
         <p:spPr>
           <a:xfrm>
-            <a:off x="2231136" y="4736592"/>
-            <a:ext cx="693800" cy="384048"/>
+            <a:off x="9904476" y="4736592"/>
+            <a:ext cx="1077468" cy="384048"/>
           </a:xfrm>
           <a:prstGeom prst="rect">
             <a:avLst/>
@@ -7315,910 +9109,7 @@
                 </a:solidFill>
                 <a:latin typeface="Microsoft YaHei"/>
               </a:rPr>
-              <a:t>文本生成</a:t>
-            </a:r>
-          </a:p>
-        </p:txBody>
-      </p:sp>
-      <p:sp>
-        <p:nvSpPr>
-          <p:cNvPr id="42" name="Right Arrow 41"/>
-          <p:cNvSpPr/>
-          <p:nvPr/>
-        </p:nvSpPr>
-        <p:spPr>
-          <a:xfrm>
-            <a:off x="3080384" y="4809744"/>
-            <a:ext cx="237744" cy="237744"/>
-          </a:xfrm>
-          <a:prstGeom prst="rightArrow">
-            <a:avLst/>
-          </a:prstGeom>
-          <a:solidFill>
-            <a:srgbClr val="E91E63"/>
-          </a:solidFill>
-          <a:ln>
-            <a:noFill/>
-          </a:ln>
-        </p:spPr>
-        <p:style>
-          <a:lnRef idx="1">
-            <a:schemeClr val="accent1"/>
-          </a:lnRef>
-          <a:fillRef idx="3">
-            <a:schemeClr val="accent1"/>
-          </a:fillRef>
-          <a:effectRef idx="2">
-            <a:schemeClr val="accent1"/>
-          </a:effectRef>
-          <a:fontRef idx="minor">
-            <a:schemeClr val="lt1"/>
-          </a:fontRef>
-        </p:style>
-        <p:txBody>
-          <a:bodyPr rtlCol="0" anchor="ctr"/>
-          <a:lstStyle/>
-          <a:p>
-            <a:pPr algn="ctr"/>
-          </a:p>
-        </p:txBody>
-      </p:sp>
-      <p:sp>
-        <p:nvSpPr>
-          <p:cNvPr id="43" name="Rounded Rectangle 42"/>
-          <p:cNvSpPr/>
-          <p:nvPr/>
-        </p:nvSpPr>
-        <p:spPr>
-          <a:xfrm>
-            <a:off x="3254121" y="4626864"/>
-            <a:ext cx="949832" cy="658368"/>
-          </a:xfrm>
-          <a:prstGeom prst="roundRect">
-            <a:avLst>
-              <a:gd name="adj" fmla="val 10000"/>
-            </a:avLst>
-          </a:prstGeom>
-          <a:solidFill>
-            <a:srgbClr val="F8F4F4"/>
-          </a:solidFill>
-          <a:ln w="10160">
-            <a:solidFill>
-              <a:srgbClr val="E9DDDD"/>
-            </a:solidFill>
-          </a:ln>
-        </p:spPr>
-        <p:style>
-          <a:lnRef idx="1">
-            <a:schemeClr val="accent1"/>
-          </a:lnRef>
-          <a:fillRef idx="3">
-            <a:schemeClr val="accent1"/>
-          </a:fillRef>
-          <a:effectRef idx="2">
-            <a:schemeClr val="accent1"/>
-          </a:effectRef>
-          <a:fontRef idx="minor">
-            <a:schemeClr val="lt1"/>
-          </a:fontRef>
-        </p:style>
-        <p:txBody>
-          <a:bodyPr rtlCol="0" anchor="ctr"/>
-          <a:lstStyle/>
-          <a:p>
-            <a:pPr algn="ctr"/>
-          </a:p>
-        </p:txBody>
-      </p:sp>
-      <p:sp>
-        <p:nvSpPr>
-          <p:cNvPr id="44" name="TextBox 43"/>
-          <p:cNvSpPr txBox="1"/>
-          <p:nvPr/>
-        </p:nvSpPr>
-        <p:spPr>
-          <a:xfrm>
-            <a:off x="3382137" y="4736592"/>
-            <a:ext cx="693800" cy="384048"/>
-          </a:xfrm>
-          <a:prstGeom prst="rect">
-            <a:avLst/>
-          </a:prstGeom>
-          <a:noFill/>
-        </p:spPr>
-        <p:txBody>
-          <a:bodyPr wrap="square" anchor="ctr">
-            <a:spAutoFit/>
-          </a:bodyPr>
-          <a:lstStyle/>
-          <a:p>
-            <a:pPr algn="l">
-              <a:spcAft>
-                <a:spcPts val="0"/>
-              </a:spcAft>
-            </a:pPr>
-            <a:r>
-              <a:rPr sz="1150" b="0">
-                <a:solidFill>
-                  <a:srgbClr val="555555"/>
-                </a:solidFill>
-                <a:latin typeface="Microsoft YaHei"/>
-              </a:rPr>
-              <a:t>网页生成</a:t>
-            </a:r>
-          </a:p>
-        </p:txBody>
-      </p:sp>
-      <p:sp>
-        <p:nvSpPr>
-          <p:cNvPr id="45" name="Right Arrow 44"/>
-          <p:cNvSpPr/>
-          <p:nvPr/>
-        </p:nvSpPr>
-        <p:spPr>
-          <a:xfrm>
-            <a:off x="4231386" y="4809744"/>
-            <a:ext cx="237744" cy="237744"/>
-          </a:xfrm>
-          <a:prstGeom prst="rightArrow">
-            <a:avLst/>
-          </a:prstGeom>
-          <a:solidFill>
-            <a:srgbClr val="E91E63"/>
-          </a:solidFill>
-          <a:ln>
-            <a:noFill/>
-          </a:ln>
-        </p:spPr>
-        <p:style>
-          <a:lnRef idx="1">
-            <a:schemeClr val="accent1"/>
-          </a:lnRef>
-          <a:fillRef idx="3">
-            <a:schemeClr val="accent1"/>
-          </a:fillRef>
-          <a:effectRef idx="2">
-            <a:schemeClr val="accent1"/>
-          </a:effectRef>
-          <a:fontRef idx="minor">
-            <a:schemeClr val="lt1"/>
-          </a:fontRef>
-        </p:style>
-        <p:txBody>
-          <a:bodyPr rtlCol="0" anchor="ctr"/>
-          <a:lstStyle/>
-          <a:p>
-            <a:pPr algn="ctr"/>
-          </a:p>
-        </p:txBody>
-      </p:sp>
-      <p:sp>
-        <p:nvSpPr>
-          <p:cNvPr id="46" name="Rounded Rectangle 45"/>
-          <p:cNvSpPr/>
-          <p:nvPr/>
-        </p:nvSpPr>
-        <p:spPr>
-          <a:xfrm>
-            <a:off x="4405121" y="4626864"/>
-            <a:ext cx="949832" cy="658368"/>
-          </a:xfrm>
-          <a:prstGeom prst="roundRect">
-            <a:avLst>
-              <a:gd name="adj" fmla="val 10000"/>
-            </a:avLst>
-          </a:prstGeom>
-          <a:solidFill>
-            <a:srgbClr val="F8F4F4"/>
-          </a:solidFill>
-          <a:ln w="10160">
-            <a:solidFill>
-              <a:srgbClr val="E9DDDD"/>
-            </a:solidFill>
-          </a:ln>
-        </p:spPr>
-        <p:style>
-          <a:lnRef idx="1">
-            <a:schemeClr val="accent1"/>
-          </a:lnRef>
-          <a:fillRef idx="3">
-            <a:schemeClr val="accent1"/>
-          </a:fillRef>
-          <a:effectRef idx="2">
-            <a:schemeClr val="accent1"/>
-          </a:effectRef>
-          <a:fontRef idx="minor">
-            <a:schemeClr val="lt1"/>
-          </a:fontRef>
-        </p:style>
-        <p:txBody>
-          <a:bodyPr rtlCol="0" anchor="ctr"/>
-          <a:lstStyle/>
-          <a:p>
-            <a:pPr algn="ctr"/>
-          </a:p>
-        </p:txBody>
-      </p:sp>
-      <p:sp>
-        <p:nvSpPr>
-          <p:cNvPr id="47" name="TextBox 46"/>
-          <p:cNvSpPr txBox="1"/>
-          <p:nvPr/>
-        </p:nvSpPr>
-        <p:spPr>
-          <a:xfrm>
-            <a:off x="4533137" y="4736592"/>
-            <a:ext cx="693800" cy="384048"/>
-          </a:xfrm>
-          <a:prstGeom prst="rect">
-            <a:avLst/>
-          </a:prstGeom>
-          <a:noFill/>
-        </p:spPr>
-        <p:txBody>
-          <a:bodyPr wrap="square" anchor="ctr">
-            <a:spAutoFit/>
-          </a:bodyPr>
-          <a:lstStyle/>
-          <a:p>
-            <a:pPr algn="l">
-              <a:spcAft>
-                <a:spcPts val="0"/>
-              </a:spcAft>
-            </a:pPr>
-            <a:r>
-              <a:rPr sz="1150" b="0">
-                <a:solidFill>
-                  <a:srgbClr val="555555"/>
-                </a:solidFill>
-                <a:latin typeface="Microsoft YaHei"/>
-              </a:rPr>
-              <a:t>营销内容生成</a:t>
-            </a:r>
-          </a:p>
-        </p:txBody>
-      </p:sp>
-      <p:sp>
-        <p:nvSpPr>
-          <p:cNvPr id="48" name="Right Arrow 47"/>
-          <p:cNvSpPr/>
-          <p:nvPr/>
-        </p:nvSpPr>
-        <p:spPr>
-          <a:xfrm>
-            <a:off x="5382387" y="4809744"/>
-            <a:ext cx="237744" cy="237744"/>
-          </a:xfrm>
-          <a:prstGeom prst="rightArrow">
-            <a:avLst/>
-          </a:prstGeom>
-          <a:solidFill>
-            <a:srgbClr val="E91E63"/>
-          </a:solidFill>
-          <a:ln>
-            <a:noFill/>
-          </a:ln>
-        </p:spPr>
-        <p:style>
-          <a:lnRef idx="1">
-            <a:schemeClr val="accent1"/>
-          </a:lnRef>
-          <a:fillRef idx="3">
-            <a:schemeClr val="accent1"/>
-          </a:fillRef>
-          <a:effectRef idx="2">
-            <a:schemeClr val="accent1"/>
-          </a:effectRef>
-          <a:fontRef idx="minor">
-            <a:schemeClr val="lt1"/>
-          </a:fontRef>
-        </p:style>
-        <p:txBody>
-          <a:bodyPr rtlCol="0" anchor="ctr"/>
-          <a:lstStyle/>
-          <a:p>
-            <a:pPr algn="ctr"/>
-          </a:p>
-        </p:txBody>
-      </p:sp>
-      <p:sp>
-        <p:nvSpPr>
-          <p:cNvPr id="49" name="Rounded Rectangle 48"/>
-          <p:cNvSpPr/>
-          <p:nvPr/>
-        </p:nvSpPr>
-        <p:spPr>
-          <a:xfrm>
-            <a:off x="5556122" y="4626864"/>
-            <a:ext cx="949832" cy="658368"/>
-          </a:xfrm>
-          <a:prstGeom prst="roundRect">
-            <a:avLst>
-              <a:gd name="adj" fmla="val 10000"/>
-            </a:avLst>
-          </a:prstGeom>
-          <a:solidFill>
-            <a:srgbClr val="F8F4F4"/>
-          </a:solidFill>
-          <a:ln w="10160">
-            <a:solidFill>
-              <a:srgbClr val="E9DDDD"/>
-            </a:solidFill>
-          </a:ln>
-        </p:spPr>
-        <p:style>
-          <a:lnRef idx="1">
-            <a:schemeClr val="accent1"/>
-          </a:lnRef>
-          <a:fillRef idx="3">
-            <a:schemeClr val="accent1"/>
-          </a:fillRef>
-          <a:effectRef idx="2">
-            <a:schemeClr val="accent1"/>
-          </a:effectRef>
-          <a:fontRef idx="minor">
-            <a:schemeClr val="lt1"/>
-          </a:fontRef>
-        </p:style>
-        <p:txBody>
-          <a:bodyPr rtlCol="0" anchor="ctr"/>
-          <a:lstStyle/>
-          <a:p>
-            <a:pPr algn="ctr"/>
-          </a:p>
-        </p:txBody>
-      </p:sp>
-      <p:sp>
-        <p:nvSpPr>
-          <p:cNvPr id="50" name="TextBox 49"/>
-          <p:cNvSpPr txBox="1"/>
-          <p:nvPr/>
-        </p:nvSpPr>
-        <p:spPr>
-          <a:xfrm>
-            <a:off x="5684138" y="4736592"/>
-            <a:ext cx="693800" cy="384048"/>
-          </a:xfrm>
-          <a:prstGeom prst="rect">
-            <a:avLst/>
-          </a:prstGeom>
-          <a:noFill/>
-        </p:spPr>
-        <p:txBody>
-          <a:bodyPr wrap="square" anchor="ctr">
-            <a:spAutoFit/>
-          </a:bodyPr>
-          <a:lstStyle/>
-          <a:p>
-            <a:pPr algn="l">
-              <a:spcAft>
-                <a:spcPts val="0"/>
-              </a:spcAft>
-            </a:pPr>
-            <a:r>
-              <a:rPr sz="1150" b="0">
-                <a:solidFill>
-                  <a:srgbClr val="555555"/>
-                </a:solidFill>
-                <a:latin typeface="Microsoft YaHei"/>
-              </a:rPr>
-              <a:t>图像生成</a:t>
-            </a:r>
-          </a:p>
-        </p:txBody>
-      </p:sp>
-      <p:sp>
-        <p:nvSpPr>
-          <p:cNvPr id="51" name="Right Arrow 50"/>
-          <p:cNvSpPr/>
-          <p:nvPr/>
-        </p:nvSpPr>
-        <p:spPr>
-          <a:xfrm>
-            <a:off x="6533387" y="4809744"/>
-            <a:ext cx="237744" cy="237744"/>
-          </a:xfrm>
-          <a:prstGeom prst="rightArrow">
-            <a:avLst/>
-          </a:prstGeom>
-          <a:solidFill>
-            <a:srgbClr val="E91E63"/>
-          </a:solidFill>
-          <a:ln>
-            <a:noFill/>
-          </a:ln>
-        </p:spPr>
-        <p:style>
-          <a:lnRef idx="1">
-            <a:schemeClr val="accent1"/>
-          </a:lnRef>
-          <a:fillRef idx="3">
-            <a:schemeClr val="accent1"/>
-          </a:fillRef>
-          <a:effectRef idx="2">
-            <a:schemeClr val="accent1"/>
-          </a:effectRef>
-          <a:fontRef idx="minor">
-            <a:schemeClr val="lt1"/>
-          </a:fontRef>
-        </p:style>
-        <p:txBody>
-          <a:bodyPr rtlCol="0" anchor="ctr"/>
-          <a:lstStyle/>
-          <a:p>
-            <a:pPr algn="ctr"/>
-          </a:p>
-        </p:txBody>
-      </p:sp>
-      <p:sp>
-        <p:nvSpPr>
-          <p:cNvPr id="52" name="Rounded Rectangle 51"/>
-          <p:cNvSpPr/>
-          <p:nvPr/>
-        </p:nvSpPr>
-        <p:spPr>
-          <a:xfrm>
-            <a:off x="6707123" y="4626864"/>
-            <a:ext cx="949832" cy="658368"/>
-          </a:xfrm>
-          <a:prstGeom prst="roundRect">
-            <a:avLst>
-              <a:gd name="adj" fmla="val 10000"/>
-            </a:avLst>
-          </a:prstGeom>
-          <a:solidFill>
-            <a:srgbClr val="F8F4F4"/>
-          </a:solidFill>
-          <a:ln w="10160">
-            <a:solidFill>
-              <a:srgbClr val="E9DDDD"/>
-            </a:solidFill>
-          </a:ln>
-        </p:spPr>
-        <p:style>
-          <a:lnRef idx="1">
-            <a:schemeClr val="accent1"/>
-          </a:lnRef>
-          <a:fillRef idx="3">
-            <a:schemeClr val="accent1"/>
-          </a:fillRef>
-          <a:effectRef idx="2">
-            <a:schemeClr val="accent1"/>
-          </a:effectRef>
-          <a:fontRef idx="minor">
-            <a:schemeClr val="lt1"/>
-          </a:fontRef>
-        </p:style>
-        <p:txBody>
-          <a:bodyPr rtlCol="0" anchor="ctr"/>
-          <a:lstStyle/>
-          <a:p>
-            <a:pPr algn="ctr"/>
-          </a:p>
-        </p:txBody>
-      </p:sp>
-      <p:sp>
-        <p:nvSpPr>
-          <p:cNvPr id="53" name="TextBox 52"/>
-          <p:cNvSpPr txBox="1"/>
-          <p:nvPr/>
-        </p:nvSpPr>
-        <p:spPr>
-          <a:xfrm>
-            <a:off x="6835139" y="4736592"/>
-            <a:ext cx="693800" cy="384048"/>
-          </a:xfrm>
-          <a:prstGeom prst="rect">
-            <a:avLst/>
-          </a:prstGeom>
-          <a:noFill/>
-        </p:spPr>
-        <p:txBody>
-          <a:bodyPr wrap="square" anchor="ctr">
-            <a:spAutoFit/>
-          </a:bodyPr>
-          <a:lstStyle/>
-          <a:p>
-            <a:pPr algn="l">
-              <a:spcAft>
-                <a:spcPts val="0"/>
-              </a:spcAft>
-            </a:pPr>
-            <a:r>
-              <a:rPr sz="1150" b="0">
-                <a:solidFill>
-                  <a:srgbClr val="555555"/>
-                </a:solidFill>
-                <a:latin typeface="Microsoft YaHei"/>
-              </a:rPr>
-              <a:t>流程优化</a:t>
-            </a:r>
-          </a:p>
-        </p:txBody>
-      </p:sp>
-      <p:sp>
-        <p:nvSpPr>
-          <p:cNvPr id="54" name="Right Arrow 53"/>
-          <p:cNvSpPr/>
-          <p:nvPr/>
-        </p:nvSpPr>
-        <p:spPr>
-          <a:xfrm>
-            <a:off x="7684388" y="4809744"/>
-            <a:ext cx="237744" cy="237744"/>
-          </a:xfrm>
-          <a:prstGeom prst="rightArrow">
-            <a:avLst/>
-          </a:prstGeom>
-          <a:solidFill>
-            <a:srgbClr val="E91E63"/>
-          </a:solidFill>
-          <a:ln>
-            <a:noFill/>
-          </a:ln>
-        </p:spPr>
-        <p:style>
-          <a:lnRef idx="1">
-            <a:schemeClr val="accent1"/>
-          </a:lnRef>
-          <a:fillRef idx="3">
-            <a:schemeClr val="accent1"/>
-          </a:fillRef>
-          <a:effectRef idx="2">
-            <a:schemeClr val="accent1"/>
-          </a:effectRef>
-          <a:fontRef idx="minor">
-            <a:schemeClr val="lt1"/>
-          </a:fontRef>
-        </p:style>
-        <p:txBody>
-          <a:bodyPr rtlCol="0" anchor="ctr"/>
-          <a:lstStyle/>
-          <a:p>
-            <a:pPr algn="ctr"/>
-          </a:p>
-        </p:txBody>
-      </p:sp>
-      <p:sp>
-        <p:nvSpPr>
-          <p:cNvPr id="55" name="Rounded Rectangle 54"/>
-          <p:cNvSpPr/>
-          <p:nvPr/>
-        </p:nvSpPr>
-        <p:spPr>
-          <a:xfrm>
-            <a:off x="7858125" y="4626864"/>
-            <a:ext cx="949832" cy="658368"/>
-          </a:xfrm>
-          <a:prstGeom prst="roundRect">
-            <a:avLst>
-              <a:gd name="adj" fmla="val 10000"/>
-            </a:avLst>
-          </a:prstGeom>
-          <a:solidFill>
-            <a:srgbClr val="F8F4F4"/>
-          </a:solidFill>
-          <a:ln w="10160">
-            <a:solidFill>
-              <a:srgbClr val="E9DDDD"/>
-            </a:solidFill>
-          </a:ln>
-        </p:spPr>
-        <p:style>
-          <a:lnRef idx="1">
-            <a:schemeClr val="accent1"/>
-          </a:lnRef>
-          <a:fillRef idx="3">
-            <a:schemeClr val="accent1"/>
-          </a:fillRef>
-          <a:effectRef idx="2">
-            <a:schemeClr val="accent1"/>
-          </a:effectRef>
-          <a:fontRef idx="minor">
-            <a:schemeClr val="lt1"/>
-          </a:fontRef>
-        </p:style>
-        <p:txBody>
-          <a:bodyPr rtlCol="0" anchor="ctr"/>
-          <a:lstStyle/>
-          <a:p>
-            <a:pPr algn="ctr"/>
-          </a:p>
-        </p:txBody>
-      </p:sp>
-      <p:sp>
-        <p:nvSpPr>
-          <p:cNvPr id="56" name="TextBox 55"/>
-          <p:cNvSpPr txBox="1"/>
-          <p:nvPr/>
-        </p:nvSpPr>
-        <p:spPr>
-          <a:xfrm>
-            <a:off x="7986141" y="4736592"/>
-            <a:ext cx="693800" cy="384048"/>
-          </a:xfrm>
-          <a:prstGeom prst="rect">
-            <a:avLst/>
-          </a:prstGeom>
-          <a:noFill/>
-        </p:spPr>
-        <p:txBody>
-          <a:bodyPr wrap="square" anchor="ctr">
-            <a:spAutoFit/>
-          </a:bodyPr>
-          <a:lstStyle/>
-          <a:p>
-            <a:pPr algn="l">
-              <a:spcAft>
-                <a:spcPts val="0"/>
-              </a:spcAft>
-            </a:pPr>
-            <a:r>
-              <a:rPr sz="1150" b="0">
-                <a:solidFill>
-                  <a:srgbClr val="555555"/>
-                </a:solidFill>
-                <a:latin typeface="Microsoft YaHei"/>
-              </a:rPr>
-              <a:t>自动履行</a:t>
-            </a:r>
-          </a:p>
-        </p:txBody>
-      </p:sp>
-      <p:sp>
-        <p:nvSpPr>
-          <p:cNvPr id="57" name="Right Arrow 56"/>
-          <p:cNvSpPr/>
-          <p:nvPr/>
-        </p:nvSpPr>
-        <p:spPr>
-          <a:xfrm>
-            <a:off x="8835390" y="4809744"/>
-            <a:ext cx="237744" cy="237744"/>
-          </a:xfrm>
-          <a:prstGeom prst="rightArrow">
-            <a:avLst/>
-          </a:prstGeom>
-          <a:solidFill>
-            <a:srgbClr val="E91E63"/>
-          </a:solidFill>
-          <a:ln>
-            <a:noFill/>
-          </a:ln>
-        </p:spPr>
-        <p:style>
-          <a:lnRef idx="1">
-            <a:schemeClr val="accent1"/>
-          </a:lnRef>
-          <a:fillRef idx="3">
-            <a:schemeClr val="accent1"/>
-          </a:fillRef>
-          <a:effectRef idx="2">
-            <a:schemeClr val="accent1"/>
-          </a:effectRef>
-          <a:fontRef idx="minor">
-            <a:schemeClr val="lt1"/>
-          </a:fontRef>
-        </p:style>
-        <p:txBody>
-          <a:bodyPr rtlCol="0" anchor="ctr"/>
-          <a:lstStyle/>
-          <a:p>
-            <a:pPr algn="ctr"/>
-          </a:p>
-        </p:txBody>
-      </p:sp>
-      <p:sp>
-        <p:nvSpPr>
-          <p:cNvPr id="58" name="Rounded Rectangle 57"/>
-          <p:cNvSpPr/>
-          <p:nvPr/>
-        </p:nvSpPr>
-        <p:spPr>
-          <a:xfrm>
-            <a:off x="9009126" y="4626864"/>
-            <a:ext cx="949832" cy="658368"/>
-          </a:xfrm>
-          <a:prstGeom prst="roundRect">
-            <a:avLst>
-              <a:gd name="adj" fmla="val 10000"/>
-            </a:avLst>
-          </a:prstGeom>
-          <a:solidFill>
-            <a:srgbClr val="F8F4F4"/>
-          </a:solidFill>
-          <a:ln w="10160">
-            <a:solidFill>
-              <a:srgbClr val="E9DDDD"/>
-            </a:solidFill>
-          </a:ln>
-        </p:spPr>
-        <p:style>
-          <a:lnRef idx="1">
-            <a:schemeClr val="accent1"/>
-          </a:lnRef>
-          <a:fillRef idx="3">
-            <a:schemeClr val="accent1"/>
-          </a:fillRef>
-          <a:effectRef idx="2">
-            <a:schemeClr val="accent1"/>
-          </a:effectRef>
-          <a:fontRef idx="minor">
-            <a:schemeClr val="lt1"/>
-          </a:fontRef>
-        </p:style>
-        <p:txBody>
-          <a:bodyPr rtlCol="0" anchor="ctr"/>
-          <a:lstStyle/>
-          <a:p>
-            <a:pPr algn="ctr"/>
-          </a:p>
-        </p:txBody>
-      </p:sp>
-      <p:sp>
-        <p:nvSpPr>
-          <p:cNvPr id="59" name="TextBox 58"/>
-          <p:cNvSpPr txBox="1"/>
-          <p:nvPr/>
-        </p:nvSpPr>
-        <p:spPr>
-          <a:xfrm>
-            <a:off x="9137142" y="4736592"/>
-            <a:ext cx="693800" cy="384048"/>
-          </a:xfrm>
-          <a:prstGeom prst="rect">
-            <a:avLst/>
-          </a:prstGeom>
-          <a:noFill/>
-        </p:spPr>
-        <p:txBody>
-          <a:bodyPr wrap="square" anchor="ctr">
-            <a:spAutoFit/>
-          </a:bodyPr>
-          <a:lstStyle/>
-          <a:p>
-            <a:pPr algn="l">
-              <a:spcAft>
-                <a:spcPts val="0"/>
-              </a:spcAft>
-            </a:pPr>
-            <a:r>
-              <a:rPr sz="1150" b="0">
-                <a:solidFill>
-                  <a:srgbClr val="555555"/>
-                </a:solidFill>
-                <a:latin typeface="Microsoft YaHei"/>
-              </a:rPr>
               <a:t>决策制定</a:t>
-            </a:r>
-          </a:p>
-        </p:txBody>
-      </p:sp>
-      <p:sp>
-        <p:nvSpPr>
-          <p:cNvPr id="60" name="Right Arrow 59"/>
-          <p:cNvSpPr/>
-          <p:nvPr/>
-        </p:nvSpPr>
-        <p:spPr>
-          <a:xfrm>
-            <a:off x="9986390" y="4809744"/>
-            <a:ext cx="237744" cy="237744"/>
-          </a:xfrm>
-          <a:prstGeom prst="rightArrow">
-            <a:avLst/>
-          </a:prstGeom>
-          <a:solidFill>
-            <a:srgbClr val="E91E63"/>
-          </a:solidFill>
-          <a:ln>
-            <a:noFill/>
-          </a:ln>
-        </p:spPr>
-        <p:style>
-          <a:lnRef idx="1">
-            <a:schemeClr val="accent1"/>
-          </a:lnRef>
-          <a:fillRef idx="3">
-            <a:schemeClr val="accent1"/>
-          </a:fillRef>
-          <a:effectRef idx="2">
-            <a:schemeClr val="accent1"/>
-          </a:effectRef>
-          <a:fontRef idx="minor">
-            <a:schemeClr val="lt1"/>
-          </a:fontRef>
-        </p:style>
-        <p:txBody>
-          <a:bodyPr rtlCol="0" anchor="ctr"/>
-          <a:lstStyle/>
-          <a:p>
-            <a:pPr algn="ctr"/>
-          </a:p>
-        </p:txBody>
-      </p:sp>
-      <p:sp>
-        <p:nvSpPr>
-          <p:cNvPr id="61" name="Rounded Rectangle 60"/>
-          <p:cNvSpPr/>
-          <p:nvPr/>
-        </p:nvSpPr>
-        <p:spPr>
-          <a:xfrm>
-            <a:off x="10160126" y="4626864"/>
-            <a:ext cx="949832" cy="658368"/>
-          </a:xfrm>
-          <a:prstGeom prst="roundRect">
-            <a:avLst>
-              <a:gd name="adj" fmla="val 10000"/>
-            </a:avLst>
-          </a:prstGeom>
-          <a:solidFill>
-            <a:srgbClr val="F8F4F4"/>
-          </a:solidFill>
-          <a:ln w="10160">
-            <a:solidFill>
-              <a:srgbClr val="E9DDDD"/>
-            </a:solidFill>
-          </a:ln>
-        </p:spPr>
-        <p:style>
-          <a:lnRef idx="1">
-            <a:schemeClr val="accent1"/>
-          </a:lnRef>
-          <a:fillRef idx="3">
-            <a:schemeClr val="accent1"/>
-          </a:fillRef>
-          <a:effectRef idx="2">
-            <a:schemeClr val="accent1"/>
-          </a:effectRef>
-          <a:fontRef idx="minor">
-            <a:schemeClr val="lt1"/>
-          </a:fontRef>
-        </p:style>
-        <p:txBody>
-          <a:bodyPr rtlCol="0" anchor="ctr"/>
-          <a:lstStyle/>
-          <a:p>
-            <a:pPr algn="ctr"/>
-          </a:p>
-        </p:txBody>
-      </p:sp>
-      <p:sp>
-        <p:nvSpPr>
-          <p:cNvPr id="62" name="TextBox 61"/>
-          <p:cNvSpPr txBox="1"/>
-          <p:nvPr/>
-        </p:nvSpPr>
-        <p:spPr>
-          <a:xfrm>
-            <a:off x="10288142" y="4736592"/>
-            <a:ext cx="693800" cy="384048"/>
-          </a:xfrm>
-          <a:prstGeom prst="rect">
-            <a:avLst/>
-          </a:prstGeom>
-          <a:noFill/>
-        </p:spPr>
-        <p:txBody>
-          <a:bodyPr wrap="square" anchor="ctr">
-            <a:spAutoFit/>
-          </a:bodyPr>
-          <a:lstStyle/>
-          <a:p>
-            <a:pPr algn="l">
-              <a:spcAft>
-                <a:spcPts val="0"/>
-              </a:spcAft>
-            </a:pPr>
-            <a:r>
-              <a:rPr sz="1150" b="0">
-                <a:solidFill>
-                  <a:srgbClr val="555555"/>
-                </a:solidFill>
-                <a:latin typeface="Microsoft YaHei"/>
-              </a:rPr>
-              <a:t>人机交互</a:t>
             </a:r>
           </a:p>
         </p:txBody>
@@ -8492,7 +9383,7 @@
                 </a:solidFill>
                 <a:latin typeface="Microsoft YaHei"/>
               </a:rPr>
-              <a:t>团队准备针对目标客群发起新一轮跨境营销活动</a:t>
+              <a:t>营销团队准备针对重点客群发起新一轮增长活动</a:t>
             </a:r>
           </a:p>
         </p:txBody>
@@ -8617,7 +9508,7 @@
                 </a:solidFill>
                 <a:latin typeface="Microsoft YaHei"/>
               </a:rPr>
-              <a:t>1. 系统读取客户画像、历史活动和渠道反馈数据</a:t>
+              <a:t>1. 系统读取客户画像、历史活动表现和渠道反馈数据</a:t>
             </a:r>
           </a:p>
           <a:p>
@@ -8633,7 +9524,7 @@
                 </a:solidFill>
                 <a:latin typeface="Microsoft YaHei"/>
               </a:rPr>
-              <a:t>2. AI 识别高价值客群、流失风险和活动切入点</a:t>
+              <a:t>2. AI 识别高价值客群、潜在流失客群和活动切入点</a:t>
             </a:r>
           </a:p>
           <a:p>
@@ -8649,7 +9540,7 @@
                 </a:solidFill>
                 <a:latin typeface="Microsoft YaHei"/>
               </a:rPr>
-              <a:t>3. AI 自动生成文案、素材和页面建议</a:t>
+              <a:t>3. AI 自动生成个性化营销文案、页面建议和活动执行策略</a:t>
             </a:r>
           </a:p>
           <a:p>
@@ -8665,7 +9556,7 @@
                 </a:solidFill>
                 <a:latin typeface="Microsoft YaHei"/>
               </a:rPr>
-              <a:t>4. AI 辅助输出活动复盘与下一步优化建议</a:t>
+              <a:t>4. 系统自动汇总活动结果并输出复盘分析与下一轮优化建议</a:t>
             </a:r>
           </a:p>
           <a:p>
@@ -8681,7 +9572,7 @@
                 </a:solidFill>
                 <a:latin typeface="Microsoft YaHei"/>
               </a:rPr>
-              <a:t>5. 对高风险客户触发 retention 动作和重点跟进</a:t>
+              <a:t>5. 对高流失风险客户触发 retention 动作和重点跟进</a:t>
             </a:r>
           </a:p>
         </p:txBody>
@@ -8804,7 +9695,7 @@
                 </a:solidFill>
                 <a:latin typeface="Microsoft YaHei"/>
               </a:rPr>
-              <a:t>形成从客户洞察、内容生产到增长复盘与流失干预的营销闭环</a:t>
+              <a:t>形成从客户洞察、内容生成、活动执行、分析复盘到流失干预的营销增长闭环</a:t>
             </a:r>
           </a:p>
         </p:txBody>
@@ -9205,7 +10096,7 @@
                 </a:solidFill>
                 <a:latin typeface="Microsoft YaHei"/>
               </a:rPr>
-              <a:t>营销增长与客户保留工作台；目标：把客户洞察、内容生成、页面建议和流失预警集中到一个可操作的工作台中</a:t>
+              <a:t>营销增长与客户保留工作台；目标：把客户洞察、内容生产、活动分析和流失预警集中到一个可操作的工作台中</a:t>
             </a:r>
           </a:p>
         </p:txBody>
@@ -9330,7 +10221,7 @@
                 </a:solidFill>
                 <a:latin typeface="Microsoft YaHei"/>
               </a:rPr>
-              <a:t>让营销团队从拆分数据、赶文案和手工复盘，转向在一个界面里完成洞察、生成和行动。</a:t>
+              <a:t>让营销团队从多系统切换和人工拼装，转向在一个工作台里完成洞察、生成、复盘和干预。</a:t>
             </a:r>
           </a:p>
         </p:txBody>
@@ -9455,7 +10346,7 @@
                 </a:solidFill>
                 <a:latin typeface="Microsoft YaHei"/>
               </a:rPr>
-              <a:t>1. 选择目标客群或活动目标</a:t>
+              <a:t>1. 选择目标客群、活动目标和重点国家站点</a:t>
             </a:r>
           </a:p>
           <a:p>
@@ -9471,7 +10362,7 @@
                 </a:solidFill>
                 <a:latin typeface="Microsoft YaHei"/>
               </a:rPr>
-              <a:t>2. 查看 AI 洞察和推荐的营销切入点</a:t>
+              <a:t>2. 查看 AI 输出的客群洞察、营销策略和风险提示</a:t>
             </a:r>
           </a:p>
           <a:p>
@@ -9487,7 +10378,7 @@
                 </a:solidFill>
                 <a:latin typeface="Microsoft YaHei"/>
               </a:rPr>
-              <a:t>3. 一键生成内容草稿、活动页面建议和 retention 动作</a:t>
+              <a:t>3. 一键生成内容建议、复盘分析和客户保留动作</a:t>
             </a:r>
           </a:p>
         </p:txBody>
@@ -9612,7 +10503,7 @@
                 </a:solidFill>
                 <a:latin typeface="Microsoft YaHei"/>
               </a:rPr>
-              <a:t>1. 客户细分洞察面板</a:t>
+              <a:t>1. 客户洞察与客群分层面板</a:t>
             </a:r>
           </a:p>
           <a:p>
@@ -9628,7 +10519,7 @@
                 </a:solidFill>
                 <a:latin typeface="Microsoft YaHei"/>
               </a:rPr>
-              <a:t>2. 内容与素材生成区</a:t>
+              <a:t>2. 营销内容与活动策略生成区</a:t>
             </a:r>
           </a:p>
           <a:p>
@@ -9644,7 +10535,7 @@
                 </a:solidFill>
                 <a:latin typeface="Microsoft YaHei"/>
               </a:rPr>
-              <a:t>3. 流失预警与行动建议区</a:t>
+              <a:t>3. 活动复盘与流失预警行动区</a:t>
             </a:r>
           </a:p>
         </p:txBody>
@@ -9752,7 +10643,7 @@
                 </a:solidFill>
                 <a:latin typeface="Microsoft YaHei"/>
               </a:rPr>
-              <a:t>能力映射与交付物</a:t>
+              <a:t>MVP 原型范围</a:t>
             </a:r>
           </a:p>
         </p:txBody>
@@ -9808,8 +10699,8 @@
         </p:nvSpPr>
         <p:spPr>
           <a:xfrm>
-            <a:off x="822960" y="1737360"/>
-            <a:ext cx="6812280" cy="4480560"/>
+            <a:off x="822960" y="1783080"/>
+            <a:ext cx="3291840" cy="2011680"/>
           </a:xfrm>
           <a:prstGeom prst="roundRect">
             <a:avLst>
@@ -9855,8 +10746,8 @@
         </p:nvSpPr>
         <p:spPr>
           <a:xfrm>
-            <a:off x="1097280" y="1965960"/>
-            <a:ext cx="6263640" cy="274320"/>
+            <a:off x="1051560" y="2011680"/>
+            <a:ext cx="2834640" cy="274320"/>
           </a:xfrm>
           <a:prstGeom prst="rect">
             <a:avLst/>
@@ -9881,7 +10772,7 @@
                 </a:solidFill>
                 <a:latin typeface="Microsoft YaHei"/>
               </a:rPr>
-              <a:t>能力卡与产品映射</a:t>
+              <a:t>目标用户</a:t>
             </a:r>
           </a:p>
         </p:txBody>
@@ -9894,8 +10785,8 @@
         </p:nvSpPr>
         <p:spPr>
           <a:xfrm>
-            <a:off x="1051560" y="2487168"/>
-            <a:ext cx="6355080" cy="3154680"/>
+            <a:off x="1051560" y="2496312"/>
+            <a:ext cx="2834640" cy="1097280"/>
           </a:xfrm>
           <a:prstGeom prst="rect">
             <a:avLst/>
@@ -9903,7 +10794,7 @@
           <a:noFill/>
         </p:spPr>
         <p:txBody>
-          <a:bodyPr wrap="square" anchor="t">
+          <a:bodyPr wrap="square" anchor="ctr">
             <a:spAutoFit/>
           </a:bodyPr>
           <a:lstStyle/>
@@ -9914,45 +10805,13 @@
               </a:spcAft>
             </a:pPr>
             <a:r>
-              <a:rPr sz="1380" b="0">
+              <a:rPr sz="1360" b="0">
                 <a:solidFill>
                   <a:srgbClr val="555555"/>
                 </a:solidFill>
                 <a:latin typeface="Microsoft YaHei"/>
               </a:rPr>
-              <a:t>客户洞察与生命周期分析 -&gt; Dynamics 365 Customer Insights, Microsoft Fabric | 交付：客户分层与洞察分析</a:t>
-            </a:r>
-          </a:p>
-          <a:p>
-            <a:pPr algn="l">
-              <a:spcAft>
-                <a:spcPts val="800"/>
-              </a:spcAft>
-            </a:pPr>
-            <a:r>
-              <a:rPr sz="1380" b="0">
-                <a:solidFill>
-                  <a:srgbClr val="555555"/>
-                </a:solidFill>
-                <a:latin typeface="Microsoft YaHei"/>
-              </a:rPr>
-              <a:t>内容与页面生成 -&gt; Azure OpenAI, Azure AI Foundry | 交付：营销内容共创</a:t>
-            </a:r>
-          </a:p>
-          <a:p>
-            <a:pPr algn="l">
-              <a:spcAft>
-                <a:spcPts val="800"/>
-              </a:spcAft>
-            </a:pPr>
-            <a:r>
-              <a:rPr sz="1380" b="0">
-                <a:solidFill>
-                  <a:srgbClr val="555555"/>
-                </a:solidFill>
-                <a:latin typeface="Microsoft YaHei"/>
-              </a:rPr>
-              <a:t>活动流程与后续动作 -&gt; Power Automate, Power Pages | 交付：活动流程与页面原型</a:t>
+              <a:t>营销负责人</a:t>
             </a:r>
           </a:p>
         </p:txBody>
@@ -9965,8 +10824,8 @@
         </p:nvSpPr>
         <p:spPr>
           <a:xfrm>
-            <a:off x="7955279" y="1737360"/>
-            <a:ext cx="3337560" cy="1920240"/>
+            <a:off x="4453128" y="1783080"/>
+            <a:ext cx="3291840" cy="2011680"/>
           </a:xfrm>
           <a:prstGeom prst="roundRect">
             <a:avLst>
@@ -10012,8 +10871,8 @@
         </p:nvSpPr>
         <p:spPr>
           <a:xfrm>
-            <a:off x="8229600" y="1956816"/>
-            <a:ext cx="2788920" cy="274320"/>
+            <a:off x="4681728" y="2011680"/>
+            <a:ext cx="2834640" cy="274320"/>
           </a:xfrm>
           <a:prstGeom prst="rect">
             <a:avLst/>
@@ -10038,7 +10897,7 @@
                 </a:solidFill>
                 <a:latin typeface="Microsoft YaHei"/>
               </a:rPr>
-              <a:t>推荐产品栈</a:t>
+              <a:t>核心任务</a:t>
             </a:r>
           </a:p>
         </p:txBody>
@@ -10051,8 +10910,8 @@
         </p:nvSpPr>
         <p:spPr>
           <a:xfrm>
-            <a:off x="8229600" y="2359152"/>
-            <a:ext cx="2788920" cy="932688"/>
+            <a:off x="4681728" y="2496312"/>
+            <a:ext cx="2834640" cy="1097280"/>
           </a:xfrm>
           <a:prstGeom prst="rect">
             <a:avLst/>
@@ -10060,24 +10919,24 @@
           <a:noFill/>
         </p:spPr>
         <p:txBody>
-          <a:bodyPr wrap="square" anchor="t">
+          <a:bodyPr wrap="square" anchor="ctr">
             <a:spAutoFit/>
           </a:bodyPr>
           <a:lstStyle/>
           <a:p>
             <a:pPr algn="l">
               <a:spcAft>
-                <a:spcPts val="0"/>
-              </a:spcAft>
-            </a:pPr>
-            <a:r>
-              <a:rPr sz="1350" b="0">
+                <a:spcPts val="800"/>
+              </a:spcAft>
+            </a:pPr>
+            <a:r>
+              <a:rPr sz="1360" b="0">
                 <a:solidFill>
                   <a:srgbClr val="555555"/>
                 </a:solidFill>
                 <a:latin typeface="Microsoft YaHei"/>
               </a:rPr>
-              <a:t>优先产品栈：Dynamics 365 Customer Insights / Microsoft Fabric / Azure OpenAI / Azure AI Foundry</a:t>
+              <a:t>在一个工作台界面里完成客群洞察查看、活动内容生成、复盘分析和流失干预触发。</a:t>
             </a:r>
           </a:p>
         </p:txBody>
@@ -10090,8 +10949,8 @@
         </p:nvSpPr>
         <p:spPr>
           <a:xfrm>
-            <a:off x="7955279" y="3977639"/>
-            <a:ext cx="3337560" cy="2240280"/>
+            <a:off x="8083296" y="1783080"/>
+            <a:ext cx="3209544" cy="2011680"/>
           </a:xfrm>
           <a:prstGeom prst="roundRect">
             <a:avLst>
@@ -10099,10 +10958,12 @@
             </a:avLst>
           </a:prstGeom>
           <a:solidFill>
-            <a:srgbClr val="C62828"/>
+            <a:srgbClr val="F8F4F4"/>
           </a:solidFill>
-          <a:ln>
-            <a:noFill/>
+          <a:ln w="10160">
+            <a:solidFill>
+              <a:srgbClr val="E9DDDD"/>
+            </a:solidFill>
           </a:ln>
         </p:spPr>
         <p:style>
@@ -10135,8 +10996,8 @@
         </p:nvSpPr>
         <p:spPr>
           <a:xfrm>
-            <a:off x="8229600" y="4224528"/>
-            <a:ext cx="2788920" cy="274320"/>
+            <a:off x="8311896" y="2011680"/>
+            <a:ext cx="2752344" cy="274320"/>
           </a:xfrm>
           <a:prstGeom prst="rect">
             <a:avLst/>
@@ -10157,11 +11018,11 @@
             <a:r>
               <a:rPr sz="1650" b="1">
                 <a:solidFill>
-                  <a:srgbClr val="FFFFFF"/>
-                </a:solidFill>
-                <a:latin typeface="Microsoft YaHei"/>
-              </a:rPr>
-              <a:t>现场交付物</a:t>
+                  <a:srgbClr val="C62828"/>
+                </a:solidFill>
+                <a:latin typeface="Microsoft YaHei"/>
+              </a:rPr>
+              <a:t>非目标范围</a:t>
             </a:r>
           </a:p>
         </p:txBody>
@@ -10174,8 +11035,94 @@
         </p:nvSpPr>
         <p:spPr>
           <a:xfrm>
-            <a:off x="8229600" y="4590288"/>
-            <a:ext cx="2788920" cy="1188720"/>
+            <a:off x="8311896" y="2496312"/>
+            <a:ext cx="2752344" cy="1097280"/>
+          </a:xfrm>
+          <a:prstGeom prst="rect">
+            <a:avLst/>
+          </a:prstGeom>
+          <a:noFill/>
+        </p:spPr>
+        <p:txBody>
+          <a:bodyPr wrap="square" anchor="ctr">
+            <a:spAutoFit/>
+          </a:bodyPr>
+          <a:lstStyle/>
+          <a:p>
+            <a:pPr algn="l">
+              <a:spcAft>
+                <a:spcPts val="800"/>
+              </a:spcAft>
+            </a:pPr>
+            <a:r>
+              <a:rPr sz="1360" b="0">
+                <a:solidFill>
+                  <a:srgbClr val="555555"/>
+                </a:solidFill>
+                <a:latin typeface="Microsoft YaHei"/>
+              </a:rPr>
+              <a:t>不接真实营销自动化平台</a:t>
+            </a:r>
+          </a:p>
+        </p:txBody>
+      </p:sp>
+      <p:sp>
+        <p:nvSpPr>
+          <p:cNvPr id="14" name="Rounded Rectangle 13"/>
+          <p:cNvSpPr/>
+          <p:nvPr/>
+        </p:nvSpPr>
+        <p:spPr>
+          <a:xfrm>
+            <a:off x="822960" y="4096512"/>
+            <a:ext cx="5212080" cy="2011680"/>
+          </a:xfrm>
+          <a:prstGeom prst="roundRect">
+            <a:avLst>
+              <a:gd name="adj" fmla="val 10000"/>
+            </a:avLst>
+          </a:prstGeom>
+          <a:solidFill>
+            <a:srgbClr val="F3EDED"/>
+          </a:solidFill>
+          <a:ln w="10160">
+            <a:solidFill>
+              <a:srgbClr val="E9DDDD"/>
+            </a:solidFill>
+          </a:ln>
+        </p:spPr>
+        <p:style>
+          <a:lnRef idx="1">
+            <a:schemeClr val="accent1"/>
+          </a:lnRef>
+          <a:fillRef idx="3">
+            <a:schemeClr val="accent1"/>
+          </a:fillRef>
+          <a:effectRef idx="2">
+            <a:schemeClr val="accent1"/>
+          </a:effectRef>
+          <a:fontRef idx="minor">
+            <a:schemeClr val="lt1"/>
+          </a:fontRef>
+        </p:style>
+        <p:txBody>
+          <a:bodyPr rtlCol="0" anchor="ctr"/>
+          <a:lstStyle/>
+          <a:p>
+            <a:pPr algn="ctr"/>
+          </a:p>
+        </p:txBody>
+      </p:sp>
+      <p:sp>
+        <p:nvSpPr>
+          <p:cNvPr id="15" name="TextBox 14"/>
+          <p:cNvSpPr txBox="1"/>
+          <p:nvPr/>
+        </p:nvSpPr>
+        <p:spPr>
+          <a:xfrm>
+            <a:off x="1051560" y="4315968"/>
+            <a:ext cx="4663440" cy="274320"/>
           </a:xfrm>
           <a:prstGeom prst="rect">
             <a:avLst/>
@@ -10194,13 +11141,273 @@
               </a:spcAft>
             </a:pPr>
             <a:r>
-              <a:rPr sz="1350" b="0">
-                <a:solidFill>
-                  <a:srgbClr val="FFFFFF"/>
-                </a:solidFill>
-                <a:latin typeface="Microsoft YaHei"/>
-              </a:rPr>
-              <a:t>现场交付物：场景设计图 / 增长工作台原型建议 / POC 验证范围</a:t>
+              <a:rPr sz="1650" b="1">
+                <a:solidFill>
+                  <a:srgbClr val="C62828"/>
+                </a:solidFill>
+                <a:latin typeface="Microsoft YaHei"/>
+              </a:rPr>
+              <a:t>页面清单</a:t>
+            </a:r>
+          </a:p>
+        </p:txBody>
+      </p:sp>
+      <p:sp>
+        <p:nvSpPr>
+          <p:cNvPr id="16" name="TextBox 15"/>
+          <p:cNvSpPr txBox="1"/>
+          <p:nvPr/>
+        </p:nvSpPr>
+        <p:spPr>
+          <a:xfrm>
+            <a:off x="1051560" y="4773168"/>
+            <a:ext cx="4663440" cy="1024128"/>
+          </a:xfrm>
+          <a:prstGeom prst="rect">
+            <a:avLst/>
+          </a:prstGeom>
+          <a:noFill/>
+        </p:spPr>
+        <p:txBody>
+          <a:bodyPr wrap="square" anchor="t">
+            <a:spAutoFit/>
+          </a:bodyPr>
+          <a:lstStyle/>
+          <a:p>
+            <a:pPr algn="l">
+              <a:spcAft>
+                <a:spcPts val="600"/>
+              </a:spcAft>
+            </a:pPr>
+            <a:r>
+              <a:rPr sz="1370" b="0">
+                <a:solidFill>
+                  <a:srgbClr val="555555"/>
+                </a:solidFill>
+                <a:latin typeface="Microsoft YaHei"/>
+              </a:rPr>
+              <a:t>1. 客户洞察与客群分层总览</a:t>
+            </a:r>
+          </a:p>
+          <a:p>
+            <a:pPr algn="l">
+              <a:spcAft>
+                <a:spcPts val="600"/>
+              </a:spcAft>
+            </a:pPr>
+            <a:r>
+              <a:rPr sz="1370" b="0">
+                <a:solidFill>
+                  <a:srgbClr val="555555"/>
+                </a:solidFill>
+                <a:latin typeface="Microsoft YaHei"/>
+              </a:rPr>
+              <a:t>2. 活动策略与内容生成页</a:t>
+            </a:r>
+          </a:p>
+          <a:p>
+            <a:pPr algn="l">
+              <a:spcAft>
+                <a:spcPts val="600"/>
+              </a:spcAft>
+            </a:pPr>
+            <a:r>
+              <a:rPr sz="1370" b="0">
+                <a:solidFill>
+                  <a:srgbClr val="555555"/>
+                </a:solidFill>
+                <a:latin typeface="Microsoft YaHei"/>
+              </a:rPr>
+              <a:t>3. 活动复盘与效果分析页</a:t>
+            </a:r>
+          </a:p>
+          <a:p>
+            <a:pPr algn="l">
+              <a:spcAft>
+                <a:spcPts val="600"/>
+              </a:spcAft>
+            </a:pPr>
+            <a:r>
+              <a:rPr sz="1370" b="0">
+                <a:solidFill>
+                  <a:srgbClr val="555555"/>
+                </a:solidFill>
+                <a:latin typeface="Microsoft YaHei"/>
+              </a:rPr>
+              <a:t>4. 流失预警与干预行动页</a:t>
+            </a:r>
+          </a:p>
+        </p:txBody>
+      </p:sp>
+      <p:sp>
+        <p:nvSpPr>
+          <p:cNvPr id="17" name="Rounded Rectangle 16"/>
+          <p:cNvSpPr/>
+          <p:nvPr/>
+        </p:nvSpPr>
+        <p:spPr>
+          <a:xfrm>
+            <a:off x="6080760" y="4096512"/>
+            <a:ext cx="5212080" cy="2011680"/>
+          </a:xfrm>
+          <a:prstGeom prst="roundRect">
+            <a:avLst>
+              <a:gd name="adj" fmla="val 10000"/>
+            </a:avLst>
+          </a:prstGeom>
+          <a:solidFill>
+            <a:srgbClr val="F8F4F4"/>
+          </a:solidFill>
+          <a:ln w="10160">
+            <a:solidFill>
+              <a:srgbClr val="E9DDDD"/>
+            </a:solidFill>
+          </a:ln>
+        </p:spPr>
+        <p:style>
+          <a:lnRef idx="1">
+            <a:schemeClr val="accent1"/>
+          </a:lnRef>
+          <a:fillRef idx="3">
+            <a:schemeClr val="accent1"/>
+          </a:fillRef>
+          <a:effectRef idx="2">
+            <a:schemeClr val="accent1"/>
+          </a:effectRef>
+          <a:fontRef idx="minor">
+            <a:schemeClr val="lt1"/>
+          </a:fontRef>
+        </p:style>
+        <p:txBody>
+          <a:bodyPr rtlCol="0" anchor="ctr"/>
+          <a:lstStyle/>
+          <a:p>
+            <a:pPr algn="ctr"/>
+          </a:p>
+        </p:txBody>
+      </p:sp>
+      <p:sp>
+        <p:nvSpPr>
+          <p:cNvPr id="18" name="TextBox 17"/>
+          <p:cNvSpPr txBox="1"/>
+          <p:nvPr/>
+        </p:nvSpPr>
+        <p:spPr>
+          <a:xfrm>
+            <a:off x="6309360" y="4315968"/>
+            <a:ext cx="4663440" cy="274320"/>
+          </a:xfrm>
+          <a:prstGeom prst="rect">
+            <a:avLst/>
+          </a:prstGeom>
+          <a:noFill/>
+        </p:spPr>
+        <p:txBody>
+          <a:bodyPr wrap="square" anchor="t">
+            <a:spAutoFit/>
+          </a:bodyPr>
+          <a:lstStyle/>
+          <a:p>
+            <a:pPr algn="l">
+              <a:spcAft>
+                <a:spcPts val="0"/>
+              </a:spcAft>
+            </a:pPr>
+            <a:r>
+              <a:rPr sz="1650" b="1">
+                <a:solidFill>
+                  <a:srgbClr val="C62828"/>
+                </a:solidFill>
+                <a:latin typeface="Microsoft YaHei"/>
+              </a:rPr>
+              <a:t>关键模块</a:t>
+            </a:r>
+          </a:p>
+        </p:txBody>
+      </p:sp>
+      <p:sp>
+        <p:nvSpPr>
+          <p:cNvPr id="19" name="TextBox 18"/>
+          <p:cNvSpPr txBox="1"/>
+          <p:nvPr/>
+        </p:nvSpPr>
+        <p:spPr>
+          <a:xfrm>
+            <a:off x="6309360" y="4773168"/>
+            <a:ext cx="4663440" cy="1024128"/>
+          </a:xfrm>
+          <a:prstGeom prst="rect">
+            <a:avLst/>
+          </a:prstGeom>
+          <a:noFill/>
+        </p:spPr>
+        <p:txBody>
+          <a:bodyPr wrap="square" anchor="t">
+            <a:spAutoFit/>
+          </a:bodyPr>
+          <a:lstStyle/>
+          <a:p>
+            <a:pPr algn="l">
+              <a:spcAft>
+                <a:spcPts val="600"/>
+              </a:spcAft>
+            </a:pPr>
+            <a:r>
+              <a:rPr sz="1370" b="0">
+                <a:solidFill>
+                  <a:srgbClr val="555555"/>
+                </a:solidFill>
+                <a:latin typeface="Microsoft YaHei"/>
+              </a:rPr>
+              <a:t>1. 高价值客群与风险客群卡片</a:t>
+            </a:r>
+          </a:p>
+          <a:p>
+            <a:pPr algn="l">
+              <a:spcAft>
+                <a:spcPts val="600"/>
+              </a:spcAft>
+            </a:pPr>
+            <a:r>
+              <a:rPr sz="1370" b="0">
+                <a:solidFill>
+                  <a:srgbClr val="555555"/>
+                </a:solidFill>
+                <a:latin typeface="Microsoft YaHei"/>
+              </a:rPr>
+              <a:t>2. 营销文案与页面建议面板</a:t>
+            </a:r>
+          </a:p>
+          <a:p>
+            <a:pPr algn="l">
+              <a:spcAft>
+                <a:spcPts val="600"/>
+              </a:spcAft>
+            </a:pPr>
+            <a:r>
+              <a:rPr sz="1370" b="0">
+                <a:solidFill>
+                  <a:srgbClr val="555555"/>
+                </a:solidFill>
+                <a:latin typeface="Microsoft YaHei"/>
+              </a:rPr>
+              <a:t>3. 活动效果分析图区</a:t>
+            </a:r>
+          </a:p>
+          <a:p>
+            <a:pPr algn="l">
+              <a:spcAft>
+                <a:spcPts val="600"/>
+              </a:spcAft>
+            </a:pPr>
+            <a:r>
+              <a:rPr sz="1370" b="0">
+                <a:solidFill>
+                  <a:srgbClr val="555555"/>
+                </a:solidFill>
+                <a:latin typeface="Microsoft YaHei"/>
+              </a:rPr>
+              <a:t>4. 流失预警与跟进任务面板</a:t>
             </a:r>
           </a:p>
         </p:txBody>
@@ -10308,7 +11515,7 @@
                 </a:solidFill>
                 <a:latin typeface="Microsoft YaHei"/>
               </a:rPr>
-              <a:t>业务价值与验证假设</a:t>
+              <a:t>原型交付与快速开发路径</a:t>
             </a:r>
           </a:p>
         </p:txBody>
@@ -10365,7 +11572,7 @@
         <p:spPr>
           <a:xfrm>
             <a:off x="822960" y="1783080"/>
-            <a:ext cx="3246120" cy="4480560"/>
+            <a:ext cx="3291840" cy="2011680"/>
           </a:xfrm>
           <a:prstGeom prst="roundRect">
             <a:avLst>
@@ -10411,7 +11618,7 @@
         </p:nvSpPr>
         <p:spPr>
           <a:xfrm>
-            <a:off x="1024128" y="1993392"/>
+            <a:off x="1051560" y="2011680"/>
             <a:ext cx="2834640" cy="274320"/>
           </a:xfrm>
           <a:prstGeom prst="rect">
@@ -10437,7 +11644,7 @@
                 </a:solidFill>
                 <a:latin typeface="Microsoft YaHei"/>
               </a:rPr>
-              <a:t>业务价值</a:t>
+              <a:t>交付方式</a:t>
             </a:r>
           </a:p>
         </p:txBody>
@@ -10450,8 +11657,8 @@
         </p:nvSpPr>
         <p:spPr>
           <a:xfrm>
-            <a:off x="1024128" y="2468880"/>
-            <a:ext cx="2834640" cy="3246120"/>
+            <a:off x="1051560" y="2496312"/>
+            <a:ext cx="2834640" cy="1097280"/>
           </a:xfrm>
           <a:prstGeom prst="rect">
             <a:avLst/>
@@ -10459,7 +11666,7 @@
           <a:noFill/>
         </p:spPr>
         <p:txBody>
-          <a:bodyPr wrap="square" anchor="t">
+          <a:bodyPr wrap="square" anchor="ctr">
             <a:spAutoFit/>
           </a:bodyPr>
           <a:lstStyle/>
@@ -10470,61 +11677,13 @@
               </a:spcAft>
             </a:pPr>
             <a:r>
-              <a:rPr sz="1400" b="0">
+              <a:rPr sz="1360" b="0">
                 <a:solidFill>
                   <a:srgbClr val="555555"/>
                 </a:solidFill>
                 <a:latin typeface="Microsoft YaHei"/>
               </a:rPr>
-              <a:t>希望更快完成个性化营销和高风险客户干预。</a:t>
-            </a:r>
-          </a:p>
-          <a:p>
-            <a:pPr algn="l">
-              <a:spcAft>
-                <a:spcPts val="800"/>
-              </a:spcAft>
-            </a:pPr>
-            <a:r>
-              <a:rPr sz="1400" b="0">
-                <a:solidFill>
-                  <a:srgbClr val="555555"/>
-                </a:solidFill>
-                <a:latin typeface="Microsoft YaHei"/>
-              </a:rPr>
-              <a:t>缩短营销活动从洞察到上线的周期</a:t>
-            </a:r>
-          </a:p>
-          <a:p>
-            <a:pPr algn="l">
-              <a:spcAft>
-                <a:spcPts val="800"/>
-              </a:spcAft>
-            </a:pPr>
-            <a:r>
-              <a:rPr sz="1400" b="0">
-                <a:solidFill>
-                  <a:srgbClr val="555555"/>
-                </a:solidFill>
-                <a:latin typeface="Microsoft YaHei"/>
-              </a:rPr>
-              <a:t>提升内容生产效率和个性化程度</a:t>
-            </a:r>
-          </a:p>
-          <a:p>
-            <a:pPr algn="l">
-              <a:spcAft>
-                <a:spcPts val="800"/>
-              </a:spcAft>
-            </a:pPr>
-            <a:r>
-              <a:rPr sz="1400" b="0">
-                <a:solidFill>
-                  <a:srgbClr val="555555"/>
-                </a:solidFill>
-                <a:latin typeface="Microsoft YaHei"/>
-              </a:rPr>
-              <a:t>更早识别流失风险并支持 retention 动作</a:t>
+              <a:t>前端壳子优先；推荐技术栈：Next.js + Tailwind CSS</a:t>
             </a:r>
           </a:p>
         </p:txBody>
@@ -10537,8 +11696,8 @@
         </p:nvSpPr>
         <p:spPr>
           <a:xfrm>
-            <a:off x="4462272" y="1783080"/>
-            <a:ext cx="3246120" cy="4480560"/>
+            <a:off x="4453128" y="1783080"/>
+            <a:ext cx="3291840" cy="2011680"/>
           </a:xfrm>
           <a:prstGeom prst="roundRect">
             <a:avLst>
@@ -10584,7 +11743,7 @@
         </p:nvSpPr>
         <p:spPr>
           <a:xfrm>
-            <a:off x="4663440" y="1993392"/>
+            <a:off x="4681728" y="2011680"/>
             <a:ext cx="2834640" cy="274320"/>
           </a:xfrm>
           <a:prstGeom prst="rect">
@@ -10610,7 +11769,7 @@
                 </a:solidFill>
                 <a:latin typeface="Microsoft YaHei"/>
               </a:rPr>
-              <a:t>关键指标</a:t>
+              <a:t>核心交付件</a:t>
             </a:r>
           </a:p>
         </p:txBody>
@@ -10623,8 +11782,8 @@
         </p:nvSpPr>
         <p:spPr>
           <a:xfrm>
-            <a:off x="4663440" y="2468880"/>
-            <a:ext cx="2834640" cy="3246120"/>
+            <a:off x="4681728" y="2496312"/>
+            <a:ext cx="2834640" cy="1097280"/>
           </a:xfrm>
           <a:prstGeom prst="rect">
             <a:avLst/>
@@ -10632,7 +11791,7 @@
           <a:noFill/>
         </p:spPr>
         <p:txBody>
-          <a:bodyPr wrap="square" anchor="t">
+          <a:bodyPr wrap="square" anchor="ctr">
             <a:spAutoFit/>
           </a:bodyPr>
           <a:lstStyle/>
@@ -10643,45 +11802,13 @@
               </a:spcAft>
             </a:pPr>
             <a:r>
-              <a:rPr sz="1400" b="0">
+              <a:rPr sz="1360" b="0">
                 <a:solidFill>
                   <a:srgbClr val="555555"/>
                 </a:solidFill>
                 <a:latin typeface="Microsoft YaHei"/>
               </a:rPr>
-              <a:t>营销准备周期缩短 40%</a:t>
-            </a:r>
-          </a:p>
-          <a:p>
-            <a:pPr algn="l">
-              <a:spcAft>
-                <a:spcPts val="800"/>
-              </a:spcAft>
-            </a:pPr>
-            <a:r>
-              <a:rPr sz="1400" b="0">
-                <a:solidFill>
-                  <a:srgbClr val="555555"/>
-                </a:solidFill>
-                <a:latin typeface="Microsoft YaHei"/>
-              </a:rPr>
-              <a:t>内容生产效率提升 50%</a:t>
-            </a:r>
-          </a:p>
-          <a:p>
-            <a:pPr algn="l">
-              <a:spcAft>
-                <a:spcPts val="800"/>
-              </a:spcAft>
-            </a:pPr>
-            <a:r>
-              <a:rPr sz="1400" b="0">
-                <a:solidFill>
-                  <a:srgbClr val="555555"/>
-                </a:solidFill>
-                <a:latin typeface="Microsoft YaHei"/>
-              </a:rPr>
-              <a:t>高风险客群识别准确率达到 80%</a:t>
+              <a:t>方案设计：页面结构、模块布局、交互路径 / 架构设计：展示层、组件层、样例数据层 / 静态页面原型：可现场演示的前端壳子</a:t>
             </a:r>
           </a:p>
         </p:txBody>
@@ -10694,8 +11821,8 @@
         </p:nvSpPr>
         <p:spPr>
           <a:xfrm>
-            <a:off x="8101583" y="1783080"/>
-            <a:ext cx="3246120" cy="4480560"/>
+            <a:off x="8083296" y="1783080"/>
+            <a:ext cx="3209544" cy="2011680"/>
           </a:xfrm>
           <a:prstGeom prst="roundRect">
             <a:avLst>
@@ -10741,8 +11868,8 @@
         </p:nvSpPr>
         <p:spPr>
           <a:xfrm>
-            <a:off x="8302752" y="1993392"/>
-            <a:ext cx="2834640" cy="274320"/>
+            <a:off x="8311896" y="2011680"/>
+            <a:ext cx="2752344" cy="274320"/>
           </a:xfrm>
           <a:prstGeom prst="rect">
             <a:avLst/>
@@ -10767,7 +11894,7 @@
                 </a:solidFill>
                 <a:latin typeface="Microsoft YaHei"/>
               </a:rPr>
-              <a:t>POC 验证点</a:t>
+              <a:t>架构原则</a:t>
             </a:r>
           </a:p>
         </p:txBody>
@@ -10780,8 +11907,94 @@
         </p:nvSpPr>
         <p:spPr>
           <a:xfrm>
-            <a:off x="8302752" y="2468880"/>
-            <a:ext cx="2834640" cy="3246120"/>
+            <a:off x="8311896" y="2496312"/>
+            <a:ext cx="2752344" cy="1097280"/>
+          </a:xfrm>
+          <a:prstGeom prst="rect">
+            <a:avLst/>
+          </a:prstGeom>
+          <a:noFill/>
+        </p:spPr>
+        <p:txBody>
+          <a:bodyPr wrap="square" anchor="ctr">
+            <a:spAutoFit/>
+          </a:bodyPr>
+          <a:lstStyle/>
+          <a:p>
+            <a:pPr algn="l">
+              <a:spcAft>
+                <a:spcPts val="800"/>
+              </a:spcAft>
+            </a:pPr>
+            <a:r>
+              <a:rPr sz="1360" b="0">
+                <a:solidFill>
+                  <a:srgbClr val="555555"/>
+                </a:solidFill>
+                <a:latin typeface="Microsoft YaHei"/>
+              </a:rPr>
+              <a:t>页面壳子优先，先保证关键业务路径可演示 / 模块分层组织，页面、组件、样例数据分开维护 / Mock 数据驱动，先不接真实系统接口</a:t>
+            </a:r>
+          </a:p>
+        </p:txBody>
+      </p:sp>
+      <p:sp>
+        <p:nvSpPr>
+          <p:cNvPr id="14" name="Rounded Rectangle 13"/>
+          <p:cNvSpPr/>
+          <p:nvPr/>
+        </p:nvSpPr>
+        <p:spPr>
+          <a:xfrm>
+            <a:off x="822960" y="4096512"/>
+            <a:ext cx="5212080" cy="2011680"/>
+          </a:xfrm>
+          <a:prstGeom prst="roundRect">
+            <a:avLst>
+              <a:gd name="adj" fmla="val 10000"/>
+            </a:avLst>
+          </a:prstGeom>
+          <a:solidFill>
+            <a:srgbClr val="F3EDED"/>
+          </a:solidFill>
+          <a:ln w="10160">
+            <a:solidFill>
+              <a:srgbClr val="E9DDDD"/>
+            </a:solidFill>
+          </a:ln>
+        </p:spPr>
+        <p:style>
+          <a:lnRef idx="1">
+            <a:schemeClr val="accent1"/>
+          </a:lnRef>
+          <a:fillRef idx="3">
+            <a:schemeClr val="accent1"/>
+          </a:fillRef>
+          <a:effectRef idx="2">
+            <a:schemeClr val="accent1"/>
+          </a:effectRef>
+          <a:fontRef idx="minor">
+            <a:schemeClr val="lt1"/>
+          </a:fontRef>
+        </p:style>
+        <p:txBody>
+          <a:bodyPr rtlCol="0" anchor="ctr"/>
+          <a:lstStyle/>
+          <a:p>
+            <a:pPr algn="ctr"/>
+          </a:p>
+        </p:txBody>
+      </p:sp>
+      <p:sp>
+        <p:nvSpPr>
+          <p:cNvPr id="15" name="TextBox 14"/>
+          <p:cNvSpPr txBox="1"/>
+          <p:nvPr/>
+        </p:nvSpPr>
+        <p:spPr>
+          <a:xfrm>
+            <a:off x="1051560" y="4315968"/>
+            <a:ext cx="4663440" cy="274320"/>
           </a:xfrm>
           <a:prstGeom prst="rect">
             <a:avLst/>
@@ -10796,49 +12009,277 @@
           <a:p>
             <a:pPr algn="l">
               <a:spcAft>
-                <a:spcPts val="800"/>
-              </a:spcAft>
-            </a:pPr>
-            <a:r>
-              <a:rPr sz="1400" b="0">
+                <a:spcPts val="0"/>
+              </a:spcAft>
+            </a:pPr>
+            <a:r>
+              <a:rPr sz="1650" b="1">
+                <a:solidFill>
+                  <a:srgbClr val="C62828"/>
+                </a:solidFill>
+                <a:latin typeface="Microsoft YaHei"/>
+              </a:rPr>
+              <a:t>方案设计与架构设计</a:t>
+            </a:r>
+          </a:p>
+        </p:txBody>
+      </p:sp>
+      <p:sp>
+        <p:nvSpPr>
+          <p:cNvPr id="16" name="TextBox 15"/>
+          <p:cNvSpPr txBox="1"/>
+          <p:nvPr/>
+        </p:nvSpPr>
+        <p:spPr>
+          <a:xfrm>
+            <a:off x="1051560" y="4773168"/>
+            <a:ext cx="4663440" cy="1024128"/>
+          </a:xfrm>
+          <a:prstGeom prst="rect">
+            <a:avLst/>
+          </a:prstGeom>
+          <a:noFill/>
+        </p:spPr>
+        <p:txBody>
+          <a:bodyPr wrap="square" anchor="t">
+            <a:spAutoFit/>
+          </a:bodyPr>
+          <a:lstStyle/>
+          <a:p>
+            <a:pPr algn="l">
+              <a:spcAft>
+                <a:spcPts val="600"/>
+              </a:spcAft>
+            </a:pPr>
+            <a:r>
+              <a:rPr sz="1370" b="0">
                 <a:solidFill>
                   <a:srgbClr val="555555"/>
                 </a:solidFill>
                 <a:latin typeface="Microsoft YaHei"/>
               </a:rPr>
-              <a:t>1. 客户分层和流失判断的业务可解释性</a:t>
-            </a:r>
-          </a:p>
-          <a:p>
-            <a:pPr algn="l">
-              <a:spcAft>
-                <a:spcPts val="800"/>
-              </a:spcAft>
-            </a:pPr>
-            <a:r>
-              <a:rPr sz="1400" b="0">
+              <a:t>1. 方案设计：页面结构、模块布局、交互路径</a:t>
+            </a:r>
+          </a:p>
+          <a:p>
+            <a:pPr algn="l">
+              <a:spcAft>
+                <a:spcPts val="600"/>
+              </a:spcAft>
+            </a:pPr>
+            <a:r>
+              <a:rPr sz="1370" b="0">
                 <a:solidFill>
                   <a:srgbClr val="555555"/>
                 </a:solidFill>
                 <a:latin typeface="Microsoft YaHei"/>
               </a:rPr>
-              <a:t>2. 内容生成结果的可用性</a:t>
-            </a:r>
-          </a:p>
-          <a:p>
-            <a:pPr algn="l">
-              <a:spcAft>
-                <a:spcPts val="800"/>
-              </a:spcAft>
-            </a:pPr>
-            <a:r>
-              <a:rPr sz="1400" b="0">
+              <a:t>2. 架构设计：展示层、组件层、样例数据层</a:t>
+            </a:r>
+          </a:p>
+          <a:p>
+            <a:pPr algn="l">
+              <a:spcAft>
+                <a:spcPts val="600"/>
+              </a:spcAft>
+            </a:pPr>
+            <a:r>
+              <a:rPr sz="1370" b="0">
                 <a:solidFill>
                   <a:srgbClr val="555555"/>
                 </a:solidFill>
                 <a:latin typeface="Microsoft YaHei"/>
               </a:rPr>
-              <a:t>3. 推荐动作对活动和保留策略的指导价值</a:t>
+              <a:t>3. 静态页面原型：可现场演示的前端壳子</a:t>
+            </a:r>
+          </a:p>
+          <a:p>
+            <a:pPr algn="l">
+              <a:spcAft>
+                <a:spcPts val="600"/>
+              </a:spcAft>
+            </a:pPr>
+            <a:r>
+              <a:rPr sz="1370" b="0">
+                <a:solidFill>
+                  <a:srgbClr val="555555"/>
+                </a:solidFill>
+                <a:latin typeface="Microsoft YaHei"/>
+              </a:rPr>
+              <a:t>4. 样例数据包：支撑页面演示的 mock 数据</a:t>
+            </a:r>
+          </a:p>
+        </p:txBody>
+      </p:sp>
+      <p:sp>
+        <p:nvSpPr>
+          <p:cNvPr id="17" name="Rounded Rectangle 16"/>
+          <p:cNvSpPr/>
+          <p:nvPr/>
+        </p:nvSpPr>
+        <p:spPr>
+          <a:xfrm>
+            <a:off x="6080760" y="4096512"/>
+            <a:ext cx="5212080" cy="2011680"/>
+          </a:xfrm>
+          <a:prstGeom prst="roundRect">
+            <a:avLst>
+              <a:gd name="adj" fmla="val 10000"/>
+            </a:avLst>
+          </a:prstGeom>
+          <a:solidFill>
+            <a:srgbClr val="F8F4F4"/>
+          </a:solidFill>
+          <a:ln w="10160">
+            <a:solidFill>
+              <a:srgbClr val="E9DDDD"/>
+            </a:solidFill>
+          </a:ln>
+        </p:spPr>
+        <p:style>
+          <a:lnRef idx="1">
+            <a:schemeClr val="accent1"/>
+          </a:lnRef>
+          <a:fillRef idx="3">
+            <a:schemeClr val="accent1"/>
+          </a:fillRef>
+          <a:effectRef idx="2">
+            <a:schemeClr val="accent1"/>
+          </a:effectRef>
+          <a:fontRef idx="minor">
+            <a:schemeClr val="lt1"/>
+          </a:fontRef>
+        </p:style>
+        <p:txBody>
+          <a:bodyPr rtlCol="0" anchor="ctr"/>
+          <a:lstStyle/>
+          <a:p>
+            <a:pPr algn="ctr"/>
+          </a:p>
+        </p:txBody>
+      </p:sp>
+      <p:sp>
+        <p:nvSpPr>
+          <p:cNvPr id="18" name="TextBox 17"/>
+          <p:cNvSpPr txBox="1"/>
+          <p:nvPr/>
+        </p:nvSpPr>
+        <p:spPr>
+          <a:xfrm>
+            <a:off x="6309360" y="4315968"/>
+            <a:ext cx="4663440" cy="274320"/>
+          </a:xfrm>
+          <a:prstGeom prst="rect">
+            <a:avLst/>
+          </a:prstGeom>
+          <a:noFill/>
+        </p:spPr>
+        <p:txBody>
+          <a:bodyPr wrap="square" anchor="t">
+            <a:spAutoFit/>
+          </a:bodyPr>
+          <a:lstStyle/>
+          <a:p>
+            <a:pPr algn="l">
+              <a:spcAft>
+                <a:spcPts val="0"/>
+              </a:spcAft>
+            </a:pPr>
+            <a:r>
+              <a:rPr sz="1650" b="1">
+                <a:solidFill>
+                  <a:srgbClr val="C62828"/>
+                </a:solidFill>
+                <a:latin typeface="Microsoft YaHei"/>
+              </a:rPr>
+              <a:t>快速开发路径</a:t>
+            </a:r>
+          </a:p>
+        </p:txBody>
+      </p:sp>
+      <p:sp>
+        <p:nvSpPr>
+          <p:cNvPr id="19" name="TextBox 18"/>
+          <p:cNvSpPr txBox="1"/>
+          <p:nvPr/>
+        </p:nvSpPr>
+        <p:spPr>
+          <a:xfrm>
+            <a:off x="6309360" y="4773168"/>
+            <a:ext cx="4663440" cy="1024128"/>
+          </a:xfrm>
+          <a:prstGeom prst="rect">
+            <a:avLst/>
+          </a:prstGeom>
+          <a:noFill/>
+        </p:spPr>
+        <p:txBody>
+          <a:bodyPr wrap="square" anchor="t">
+            <a:spAutoFit/>
+          </a:bodyPr>
+          <a:lstStyle/>
+          <a:p>
+            <a:pPr algn="l">
+              <a:spcAft>
+                <a:spcPts val="600"/>
+              </a:spcAft>
+            </a:pPr>
+            <a:r>
+              <a:rPr sz="1370" b="0">
+                <a:solidFill>
+                  <a:srgbClr val="555555"/>
+                </a:solidFill>
+                <a:latin typeface="Microsoft YaHei"/>
+              </a:rPr>
+              <a:t>1. 确认一个重点国家站点和一类目标客群作为试点</a:t>
+            </a:r>
+          </a:p>
+          <a:p>
+            <a:pPr algn="l">
+              <a:spcAft>
+                <a:spcPts val="600"/>
+              </a:spcAft>
+            </a:pPr>
+            <a:r>
+              <a:rPr sz="1370" b="0">
+                <a:solidFill>
+                  <a:srgbClr val="555555"/>
+                </a:solidFill>
+                <a:latin typeface="Microsoft YaHei"/>
+              </a:rPr>
+              <a:t>2. 准备客户画像、活动结果和流失样本数据</a:t>
+            </a:r>
+          </a:p>
+          <a:p>
+            <a:pPr algn="l">
+              <a:spcAft>
+                <a:spcPts val="600"/>
+              </a:spcAft>
+            </a:pPr>
+            <a:r>
+              <a:rPr sz="1370" b="0">
+                <a:solidFill>
+                  <a:srgbClr val="555555"/>
+                </a:solidFill>
+                <a:latin typeface="Microsoft YaHei"/>
+              </a:rPr>
+              <a:t>3. 两周内完成工作台原型与验证口径</a:t>
+            </a:r>
+          </a:p>
+          <a:p>
+            <a:pPr algn="l">
+              <a:spcAft>
+                <a:spcPts val="600"/>
+              </a:spcAft>
+            </a:pPr>
+            <a:r>
+              <a:rPr sz="1370" b="0">
+                <a:solidFill>
+                  <a:srgbClr val="555555"/>
+                </a:solidFill>
+                <a:latin typeface="Microsoft YaHei"/>
+              </a:rPr>
+              <a:t>4. 基于方案设计文档快速搭建静态页面和样例数据</a:t>
             </a:r>
           </a:p>
         </p:txBody>
@@ -10946,7 +12387,7 @@
                 </a:solidFill>
                 <a:latin typeface="Microsoft YaHei"/>
               </a:rPr>
-              <a:t>POC 与下一步</a:t>
+              <a:t>能力映射与交付物</a:t>
             </a:r>
           </a:p>
         </p:txBody>
@@ -11003,130 +12444,7 @@
         <p:spPr>
           <a:xfrm>
             <a:off x="822960" y="1737360"/>
-            <a:ext cx="10469880" cy="731520"/>
-          </a:xfrm>
-          <a:prstGeom prst="roundRect">
-            <a:avLst>
-              <a:gd name="adj" fmla="val 10000"/>
-            </a:avLst>
-          </a:prstGeom>
-          <a:solidFill>
-            <a:srgbClr val="C62828"/>
-          </a:solidFill>
-          <a:ln>
-            <a:noFill/>
-          </a:ln>
-        </p:spPr>
-        <p:style>
-          <a:lnRef idx="1">
-            <a:schemeClr val="accent1"/>
-          </a:lnRef>
-          <a:fillRef idx="3">
-            <a:schemeClr val="accent1"/>
-          </a:fillRef>
-          <a:effectRef idx="2">
-            <a:schemeClr val="accent1"/>
-          </a:effectRef>
-          <a:fontRef idx="minor">
-            <a:schemeClr val="lt1"/>
-          </a:fontRef>
-        </p:style>
-        <p:txBody>
-          <a:bodyPr rtlCol="0" anchor="ctr"/>
-          <a:lstStyle/>
-          <a:p>
-            <a:pPr algn="ctr"/>
-          </a:p>
-        </p:txBody>
-      </p:sp>
-      <p:sp>
-        <p:nvSpPr>
-          <p:cNvPr id="6" name="TextBox 5"/>
-          <p:cNvSpPr txBox="1"/>
-          <p:nvPr/>
-        </p:nvSpPr>
-        <p:spPr>
-          <a:xfrm>
-            <a:off x="1097280" y="1883664"/>
-            <a:ext cx="1234440" cy="274320"/>
-          </a:xfrm>
-          <a:prstGeom prst="rect">
-            <a:avLst/>
-          </a:prstGeom>
-          <a:noFill/>
-        </p:spPr>
-        <p:txBody>
-          <a:bodyPr wrap="square" anchor="t">
-            <a:spAutoFit/>
-          </a:bodyPr>
-          <a:lstStyle/>
-          <a:p>
-            <a:pPr algn="l">
-              <a:spcAft>
-                <a:spcPts val="0"/>
-              </a:spcAft>
-            </a:pPr>
-            <a:r>
-              <a:rPr sz="1650" b="1">
-                <a:solidFill>
-                  <a:srgbClr val="FFFFFF"/>
-                </a:solidFill>
-                <a:latin typeface="Microsoft YaHei"/>
-              </a:rPr>
-              <a:t>POC 范围</a:t>
-            </a:r>
-          </a:p>
-        </p:txBody>
-      </p:sp>
-      <p:sp>
-        <p:nvSpPr>
-          <p:cNvPr id="7" name="TextBox 6"/>
-          <p:cNvSpPr txBox="1"/>
-          <p:nvPr/>
-        </p:nvSpPr>
-        <p:spPr>
-          <a:xfrm>
-            <a:off x="2103120" y="1874519"/>
-            <a:ext cx="8138160" cy="384048"/>
-          </a:xfrm>
-          <a:prstGeom prst="rect">
-            <a:avLst/>
-          </a:prstGeom>
-          <a:noFill/>
-        </p:spPr>
-        <p:txBody>
-          <a:bodyPr wrap="square" anchor="ctr">
-            <a:spAutoFit/>
-          </a:bodyPr>
-          <a:lstStyle/>
-          <a:p>
-            <a:pPr algn="l">
-              <a:spcAft>
-                <a:spcPts val="0"/>
-              </a:spcAft>
-            </a:pPr>
-            <a:r>
-              <a:rPr sz="1520" b="1">
-                <a:solidFill>
-                  <a:srgbClr val="FFFFFF"/>
-                </a:solidFill>
-                <a:latin typeface="Microsoft YaHei"/>
-              </a:rPr>
-              <a:t>先验证客户洞察、内容生成和 retention 建议三段闭环</a:t>
-            </a:r>
-          </a:p>
-        </p:txBody>
-      </p:sp>
-      <p:sp>
-        <p:nvSpPr>
-          <p:cNvPr id="8" name="Rounded Rectangle 7"/>
-          <p:cNvSpPr/>
-          <p:nvPr/>
-        </p:nvSpPr>
-        <p:spPr>
-          <a:xfrm>
-            <a:off x="822960" y="2743200"/>
-            <a:ext cx="4983480" cy="3383280"/>
+            <a:ext cx="6812280" cy="4480560"/>
           </a:xfrm>
           <a:prstGeom prst="roundRect">
             <a:avLst>
@@ -11166,14 +12484,14 @@
       </p:sp>
       <p:sp>
         <p:nvSpPr>
-          <p:cNvPr id="9" name="TextBox 8"/>
+          <p:cNvPr id="6" name="TextBox 5"/>
           <p:cNvSpPr txBox="1"/>
           <p:nvPr/>
         </p:nvSpPr>
         <p:spPr>
           <a:xfrm>
-            <a:off x="1097280" y="2971800"/>
-            <a:ext cx="4434840" cy="274320"/>
+            <a:off x="1097280" y="1965960"/>
+            <a:ext cx="6263640" cy="274320"/>
           </a:xfrm>
           <a:prstGeom prst="rect">
             <a:avLst/>
@@ -11198,21 +12516,21 @@
                 </a:solidFill>
                 <a:latin typeface="Microsoft YaHei"/>
               </a:rPr>
-              <a:t>关键角色</a:t>
-            </a:r>
-          </a:p>
-        </p:txBody>
-      </p:sp>
-      <p:sp>
-        <p:nvSpPr>
-          <p:cNvPr id="10" name="TextBox 9"/>
+              <a:t>能力卡与产品映射</a:t>
+            </a:r>
+          </a:p>
+        </p:txBody>
+      </p:sp>
+      <p:sp>
+        <p:nvSpPr>
+          <p:cNvPr id="7" name="TextBox 6"/>
           <p:cNvSpPr txBox="1"/>
           <p:nvPr/>
         </p:nvSpPr>
         <p:spPr>
           <a:xfrm>
-            <a:off x="1097280" y="3474720"/>
-            <a:ext cx="4434840" cy="2148840"/>
+            <a:off x="1051560" y="2487168"/>
+            <a:ext cx="6355080" cy="3154680"/>
           </a:xfrm>
           <a:prstGeom prst="rect">
             <a:avLst/>
@@ -11227,63 +12545,63 @@
           <a:p>
             <a:pPr algn="l">
               <a:spcAft>
-                <a:spcPts val="1000"/>
-              </a:spcAft>
-            </a:pPr>
-            <a:r>
-              <a:rPr sz="1450" b="0">
+                <a:spcPts val="800"/>
+              </a:spcAft>
+            </a:pPr>
+            <a:r>
+              <a:rPr sz="1380" b="0">
                 <a:solidFill>
                   <a:srgbClr val="555555"/>
                 </a:solidFill>
                 <a:latin typeface="Microsoft YaHei"/>
               </a:rPr>
-              <a:t>营销负责人</a:t>
-            </a:r>
-          </a:p>
-          <a:p>
-            <a:pPr algn="l">
-              <a:spcAft>
-                <a:spcPts val="1000"/>
-              </a:spcAft>
-            </a:pPr>
-            <a:r>
-              <a:rPr sz="1450" b="0">
+              <a:t>客户画像与客群分层 -&gt; Dynamics 365 Customer Insights, Microsoft Fabric | 交付：客户分群、生命周期洞察与营销切入建议</a:t>
+            </a:r>
+          </a:p>
+          <a:p>
+            <a:pPr algn="l">
+              <a:spcAft>
+                <a:spcPts val="800"/>
+              </a:spcAft>
+            </a:pPr>
+            <a:r>
+              <a:rPr sz="1380" b="0">
                 <a:solidFill>
                   <a:srgbClr val="555555"/>
                 </a:solidFill>
                 <a:latin typeface="Microsoft YaHei"/>
               </a:rPr>
-              <a:t>CRM 运营负责人</a:t>
-            </a:r>
-          </a:p>
-          <a:p>
-            <a:pPr algn="l">
-              <a:spcAft>
-                <a:spcPts val="1000"/>
-              </a:spcAft>
-            </a:pPr>
-            <a:r>
-              <a:rPr sz="1450" b="0">
+              <a:t>营销内容与活动页面生成 -&gt; Azure OpenAI, Azure AI Foundry, Power Pages | 交付：多语言营销内容和活动页面原型</a:t>
+            </a:r>
+          </a:p>
+          <a:p>
+            <a:pPr algn="l">
+              <a:spcAft>
+                <a:spcPts val="800"/>
+              </a:spcAft>
+            </a:pPr>
+            <a:r>
+              <a:rPr sz="1380" b="0">
                 <a:solidFill>
                   <a:srgbClr val="555555"/>
                 </a:solidFill>
                 <a:latin typeface="Microsoft YaHei"/>
               </a:rPr>
-              <a:t>数据 / 数字化团队</a:t>
-            </a:r>
-          </a:p>
-        </p:txBody>
-      </p:sp>
-      <p:sp>
-        <p:nvSpPr>
-          <p:cNvPr id="11" name="Rounded Rectangle 10"/>
+              <a:t>活动分析与流失预警 -&gt; Microsoft Fabric, Power BI, Power Automate | 交付：活动复盘分析、风险预警与自动化跟进动作</a:t>
+            </a:r>
+          </a:p>
+        </p:txBody>
+      </p:sp>
+      <p:sp>
+        <p:nvSpPr>
+          <p:cNvPr id="8" name="Rounded Rectangle 7"/>
           <p:cNvSpPr/>
           <p:nvPr/>
         </p:nvSpPr>
         <p:spPr>
           <a:xfrm>
-            <a:off x="6309360" y="2743200"/>
-            <a:ext cx="4983480" cy="3383280"/>
+            <a:off x="7955279" y="1737360"/>
+            <a:ext cx="3337560" cy="1920240"/>
           </a:xfrm>
           <a:prstGeom prst="roundRect">
             <a:avLst>
@@ -11323,14 +12641,14 @@
       </p:sp>
       <p:sp>
         <p:nvSpPr>
-          <p:cNvPr id="12" name="TextBox 11"/>
+          <p:cNvPr id="9" name="TextBox 8"/>
           <p:cNvSpPr txBox="1"/>
           <p:nvPr/>
         </p:nvSpPr>
         <p:spPr>
           <a:xfrm>
-            <a:off x="6583680" y="2971800"/>
-            <a:ext cx="4434840" cy="274320"/>
+            <a:off x="8229600" y="1956816"/>
+            <a:ext cx="2788920" cy="274320"/>
           </a:xfrm>
           <a:prstGeom prst="rect">
             <a:avLst/>
@@ -11355,21 +12673,21 @@
                 </a:solidFill>
                 <a:latin typeface="Microsoft YaHei"/>
               </a:rPr>
-              <a:t>后续动作</a:t>
-            </a:r>
-          </a:p>
-        </p:txBody>
-      </p:sp>
-      <p:sp>
-        <p:nvSpPr>
-          <p:cNvPr id="13" name="TextBox 12"/>
+              <a:t>推荐产品栈</a:t>
+            </a:r>
+          </a:p>
+        </p:txBody>
+      </p:sp>
+      <p:sp>
+        <p:nvSpPr>
+          <p:cNvPr id="10" name="TextBox 9"/>
           <p:cNvSpPr txBox="1"/>
           <p:nvPr/>
         </p:nvSpPr>
         <p:spPr>
           <a:xfrm>
-            <a:off x="6583680" y="3474720"/>
-            <a:ext cx="4434840" cy="2148840"/>
+            <a:off x="8229600" y="2359152"/>
+            <a:ext cx="2788920" cy="932688"/>
           </a:xfrm>
           <a:prstGeom prst="rect">
             <a:avLst/>
@@ -11384,49 +12702,140 @@
           <a:p>
             <a:pPr algn="l">
               <a:spcAft>
-                <a:spcPts val="1000"/>
-              </a:spcAft>
-            </a:pPr>
-            <a:r>
-              <a:rPr sz="1450" b="0">
+                <a:spcPts val="0"/>
+              </a:spcAft>
+            </a:pPr>
+            <a:r>
+              <a:rPr sz="1350" b="0">
                 <a:solidFill>
                   <a:srgbClr val="555555"/>
                 </a:solidFill>
                 <a:latin typeface="Microsoft YaHei"/>
               </a:rPr>
-              <a:t>1. 确认目标客群和样本活动数据</a:t>
-            </a:r>
-          </a:p>
-          <a:p>
-            <a:pPr algn="l">
-              <a:spcAft>
-                <a:spcPts val="1000"/>
-              </a:spcAft>
-            </a:pPr>
-            <a:r>
-              <a:rPr sz="1450" b="0">
-                <a:solidFill>
-                  <a:srgbClr val="555555"/>
-                </a:solidFill>
-                <a:latin typeface="Microsoft YaHei"/>
-              </a:rPr>
-              <a:t>2. 选择一个具体营销活动作为试点</a:t>
-            </a:r>
-          </a:p>
-          <a:p>
-            <a:pPr algn="l">
-              <a:spcAft>
-                <a:spcPts val="1000"/>
-              </a:spcAft>
-            </a:pPr>
-            <a:r>
-              <a:rPr sz="1450" b="0">
-                <a:solidFill>
-                  <a:srgbClr val="555555"/>
-                </a:solidFill>
-                <a:latin typeface="Microsoft YaHei"/>
-              </a:rPr>
-              <a:t>3. 两周内形成工作台原型和验证口径</a:t>
+              <a:t>优先产品栈：Dynamics 365 Customer Insights / Microsoft Fabric / Azure OpenAI / Azure AI Foundry</a:t>
+            </a:r>
+          </a:p>
+        </p:txBody>
+      </p:sp>
+      <p:sp>
+        <p:nvSpPr>
+          <p:cNvPr id="11" name="Rounded Rectangle 10"/>
+          <p:cNvSpPr/>
+          <p:nvPr/>
+        </p:nvSpPr>
+        <p:spPr>
+          <a:xfrm>
+            <a:off x="7955279" y="3977639"/>
+            <a:ext cx="3337560" cy="2240280"/>
+          </a:xfrm>
+          <a:prstGeom prst="roundRect">
+            <a:avLst>
+              <a:gd name="adj" fmla="val 10000"/>
+            </a:avLst>
+          </a:prstGeom>
+          <a:solidFill>
+            <a:srgbClr val="C62828"/>
+          </a:solidFill>
+          <a:ln>
+            <a:noFill/>
+          </a:ln>
+        </p:spPr>
+        <p:style>
+          <a:lnRef idx="1">
+            <a:schemeClr val="accent1"/>
+          </a:lnRef>
+          <a:fillRef idx="3">
+            <a:schemeClr val="accent1"/>
+          </a:fillRef>
+          <a:effectRef idx="2">
+            <a:schemeClr val="accent1"/>
+          </a:effectRef>
+          <a:fontRef idx="minor">
+            <a:schemeClr val="lt1"/>
+          </a:fontRef>
+        </p:style>
+        <p:txBody>
+          <a:bodyPr rtlCol="0" anchor="ctr"/>
+          <a:lstStyle/>
+          <a:p>
+            <a:pPr algn="ctr"/>
+          </a:p>
+        </p:txBody>
+      </p:sp>
+      <p:sp>
+        <p:nvSpPr>
+          <p:cNvPr id="12" name="TextBox 11"/>
+          <p:cNvSpPr txBox="1"/>
+          <p:nvPr/>
+        </p:nvSpPr>
+        <p:spPr>
+          <a:xfrm>
+            <a:off x="8229600" y="4224528"/>
+            <a:ext cx="2788920" cy="274320"/>
+          </a:xfrm>
+          <a:prstGeom prst="rect">
+            <a:avLst/>
+          </a:prstGeom>
+          <a:noFill/>
+        </p:spPr>
+        <p:txBody>
+          <a:bodyPr wrap="square" anchor="t">
+            <a:spAutoFit/>
+          </a:bodyPr>
+          <a:lstStyle/>
+          <a:p>
+            <a:pPr algn="l">
+              <a:spcAft>
+                <a:spcPts val="0"/>
+              </a:spcAft>
+            </a:pPr>
+            <a:r>
+              <a:rPr sz="1650" b="1">
+                <a:solidFill>
+                  <a:srgbClr val="FFFFFF"/>
+                </a:solidFill>
+                <a:latin typeface="Microsoft YaHei"/>
+              </a:rPr>
+              <a:t>现场交付物</a:t>
+            </a:r>
+          </a:p>
+        </p:txBody>
+      </p:sp>
+      <p:sp>
+        <p:nvSpPr>
+          <p:cNvPr id="13" name="TextBox 12"/>
+          <p:cNvSpPr txBox="1"/>
+          <p:nvPr/>
+        </p:nvSpPr>
+        <p:spPr>
+          <a:xfrm>
+            <a:off x="8229600" y="4590288"/>
+            <a:ext cx="2788920" cy="1188720"/>
+          </a:xfrm>
+          <a:prstGeom prst="rect">
+            <a:avLst/>
+          </a:prstGeom>
+          <a:noFill/>
+        </p:spPr>
+        <p:txBody>
+          <a:bodyPr wrap="square" anchor="t">
+            <a:spAutoFit/>
+          </a:bodyPr>
+          <a:lstStyle/>
+          <a:p>
+            <a:pPr algn="l">
+              <a:spcAft>
+                <a:spcPts val="0"/>
+              </a:spcAft>
+            </a:pPr>
+            <a:r>
+              <a:rPr sz="1350" b="0">
+                <a:solidFill>
+                  <a:srgbClr val="FFFFFF"/>
+                </a:solidFill>
+                <a:latin typeface="Microsoft YaHei"/>
+              </a:rPr>
+              <a:t>现场交付物：方案 PPT / 营销增长与客户保留工作台原型建议 / POC 验证范围与里程碑</a:t>
             </a:r>
           </a:p>
         </p:txBody>
